--- a/备选资产/结构图/三层组织树-001/example.pptx
+++ b/备选资产/结构图/三层组织树-001/example.pptx
@@ -2,13 +2,13 @@
 <file path=ppt/presentation.xml><?xml version="1.0" encoding="utf-8"?>
 <p:presentation xmlns:p="http://schemas.openxmlformats.org/presentationml/2006/main">
   <p:sldMasterIdLst>
-    <p:sldMasterId xmlns:r="http://schemas.openxmlformats.org/officeDocument/2006/relationships" id="2147483648" r:id="R3ce76f8ca14e4509"/>
+    <p:sldMasterId xmlns:r="http://schemas.openxmlformats.org/officeDocument/2006/relationships" id="2147483648" r:id="R48c3033493614e0d"/>
   </p:sldMasterIdLst>
   <p:notesMasterIdLst>
-    <p:notesMasterId xmlns:r="http://schemas.openxmlformats.org/officeDocument/2006/relationships" r:id="R2668bbb73a074fb8"/>
+    <p:notesMasterId xmlns:r="http://schemas.openxmlformats.org/officeDocument/2006/relationships" r:id="Rebdb2969f7e0481b"/>
   </p:notesMasterIdLst>
   <p:sldIdLst>
-    <p:sldId xmlns:r="http://schemas.openxmlformats.org/officeDocument/2006/relationships" id="256" r:id="R25ddeafe61b044ba"/>
+    <p:sldId xmlns:r="http://schemas.openxmlformats.org/officeDocument/2006/relationships" id="256" r:id="R070bbb1884d44649"/>
   </p:sldIdLst>
   <p:sldSz cx="12192000" cy="6858000"/>
   <p:notesSz cx="6858000" cy="9144000"/>
@@ -506,7 +506,7 @@
   </p:cSld>
   <p:clrMap bg1="lt1" tx1="dk1" bg2="lt2" tx2="dk2" accent1="accent1" accent2="accent2" accent3="accent3" accent4="accent4" accent5="accent5" accent6="accent6" hlink="hlink" folHlink="folHlink"/>
   <p:sldLayoutIdLst>
-    <p:sldLayoutId xmlns:r="http://schemas.openxmlformats.org/officeDocument/2006/relationships" id="2147483649" r:id="R9ebf44c17afd45eb"/>
+    <p:sldLayoutId xmlns:r="http://schemas.openxmlformats.org/officeDocument/2006/relationships" id="2147483649" r:id="R215afe1c3ced4cd3"/>
   </p:sldLayoutIdLst>
   <p:txStyles>
     <p:titleStyle>
@@ -1054,10 +1054,10 @@
       </p:grpSpPr>
       <p:sp>
         <p:nvSpPr>
-          <p:cNvPr id="43" name="">
-            <a:extLst xmlns:a="http://schemas.openxmlformats.org/drawingml/2006/main">
-              <a:ext uri="{FF2B5EF4-FFF2-40B4-BE49-F238E27FC236}">
-                <a16:creationId xmlns:a16="http://schemas.microsoft.com/office/drawing/2014/main" id="{5A292FDA-9490-4ACA-BCDC-7025ED4122F5}"/>
+          <p:cNvPr id="47" name="">
+            <a:extLst xmlns:a="http://schemas.openxmlformats.org/drawingml/2006/main">
+              <a:ext uri="{FF2B5EF4-FFF2-40B4-BE49-F238E27FC236}">
+                <a16:creationId xmlns:a16="http://schemas.microsoft.com/office/drawing/2014/main" id="{AFFC29B3-5945-4970-827F-15E0741C7C33}"/>
               </a:ext>
             </a:extLst>
           </p:cNvPr>
@@ -1115,7 +1115,7 @@
           <p:cNvPr id="2" name="">
             <a:extLst xmlns:a="http://schemas.openxmlformats.org/drawingml/2006/main">
               <a:ext uri="{FF2B5EF4-FFF2-40B4-BE49-F238E27FC236}">
-                <a16:creationId xmlns:a16="http://schemas.microsoft.com/office/drawing/2014/main" id="{F9286161-4758-44F9-B179-0AFD45F76C30}"/>
+                <a16:creationId xmlns:a16="http://schemas.microsoft.com/office/drawing/2014/main" id="{5318D700-56EC-4A44-B6F4-DD1ADDF2AF0E}"/>
               </a:ext>
             </a:extLst>
           </p:cNvPr>
@@ -1163,7 +1163,7 @@
                 <a:ea typeface="Microsoft YaHei"/>
                 <a:cs typeface="Microsoft YaHei"/>
               </a:rPr>
-              <a:t>三层组织树</a:t>
+              <a:t>组织层级 · 角色分工</a:t>
             </a:r>
           </a:p>
         </p:txBody>
@@ -1173,19 +1173,19 @@
           <p:cNvPr id="3" name="">
             <a:extLst xmlns:a="http://schemas.openxmlformats.org/drawingml/2006/main">
               <a:ext uri="{FF2B5EF4-FFF2-40B4-BE49-F238E27FC236}">
-                <a16:creationId xmlns:a16="http://schemas.microsoft.com/office/drawing/2014/main" id="{EE604BF8-A078-4AC0-B9CA-DD24B94FFB03}"/>
-              </a:ext>
-            </a:extLst>
-          </p:cNvPr>
-          <p:cNvSpPr>
-            <a:spLocks xmlns:a="http://schemas.openxmlformats.org/drawingml/2006/main" noGrp="1"/>
-          </p:cNvSpPr>
-          <p:nvPr/>
-        </p:nvSpPr>
-        <p:spPr>
-          <a:xfrm xmlns:a="http://schemas.openxmlformats.org/drawingml/2006/main" flipV="0">
-            <a:off x="6096000" y="2190750"/>
-            <a:ext cx="0" cy="400050"/>
+                <a16:creationId xmlns:a16="http://schemas.microsoft.com/office/drawing/2014/main" id="{379C6C1C-8274-4BED-B361-1B10B43B57AF}"/>
+              </a:ext>
+            </a:extLst>
+          </p:cNvPr>
+          <p:cNvSpPr>
+            <a:spLocks xmlns:a="http://schemas.openxmlformats.org/drawingml/2006/main" noGrp="1"/>
+          </p:cNvSpPr>
+          <p:nvPr/>
+        </p:nvSpPr>
+        <p:spPr>
+          <a:xfrm xmlns:a="http://schemas.openxmlformats.org/drawingml/2006/main" flipH="0" flipV="0">
+            <a:off x="6096000" y="2171700"/>
+            <a:ext cx="0" cy="457200"/>
           </a:xfrm>
           <a:prstGeom xmlns:a="http://schemas.openxmlformats.org/drawingml/2006/main" prst="line">
             <a:avLst/>
@@ -1204,18 +1204,18 @@
           <p:cNvPr id="4" name="">
             <a:extLst xmlns:a="http://schemas.openxmlformats.org/drawingml/2006/main">
               <a:ext uri="{FF2B5EF4-FFF2-40B4-BE49-F238E27FC236}">
-                <a16:creationId xmlns:a16="http://schemas.microsoft.com/office/drawing/2014/main" id="{C7DAC330-B3AE-4DBB-AEBA-85CA0C5A7230}"/>
-              </a:ext>
-            </a:extLst>
-          </p:cNvPr>
-          <p:cNvSpPr>
-            <a:spLocks xmlns:a="http://schemas.openxmlformats.org/drawingml/2006/main" noGrp="1"/>
-          </p:cNvSpPr>
-          <p:nvPr/>
-        </p:nvSpPr>
-        <p:spPr>
-          <a:xfrm xmlns:a="http://schemas.openxmlformats.org/drawingml/2006/main" flipV="0">
-            <a:off x="1428750" y="2590800"/>
+                <a16:creationId xmlns:a16="http://schemas.microsoft.com/office/drawing/2014/main" id="{4FA895BA-6D75-48B0-BDC2-44BEF510C471}"/>
+              </a:ext>
+            </a:extLst>
+          </p:cNvPr>
+          <p:cNvSpPr>
+            <a:spLocks xmlns:a="http://schemas.openxmlformats.org/drawingml/2006/main" noGrp="1"/>
+          </p:cNvSpPr>
+          <p:nvPr/>
+        </p:nvSpPr>
+        <p:spPr>
+          <a:xfrm xmlns:a="http://schemas.openxmlformats.org/drawingml/2006/main" flipH="0" flipV="0">
+            <a:off x="1428750" y="2628900"/>
             <a:ext cx="9334500" cy="0"/>
           </a:xfrm>
           <a:prstGeom xmlns:a="http://schemas.openxmlformats.org/drawingml/2006/main" prst="line">
@@ -1235,19 +1235,19 @@
           <p:cNvPr id="5" name="">
             <a:extLst xmlns:a="http://schemas.openxmlformats.org/drawingml/2006/main">
               <a:ext uri="{FF2B5EF4-FFF2-40B4-BE49-F238E27FC236}">
-                <a16:creationId xmlns:a16="http://schemas.microsoft.com/office/drawing/2014/main" id="{1FA66619-876C-47A2-B731-6FE27C71299E}"/>
-              </a:ext>
-            </a:extLst>
-          </p:cNvPr>
-          <p:cNvSpPr>
-            <a:spLocks xmlns:a="http://schemas.openxmlformats.org/drawingml/2006/main" noGrp="1"/>
-          </p:cNvSpPr>
-          <p:nvPr/>
-        </p:nvSpPr>
-        <p:spPr>
-          <a:xfrm xmlns:a="http://schemas.openxmlformats.org/drawingml/2006/main" flipV="0">
-            <a:off x="1428750" y="2590800"/>
-            <a:ext cx="0" cy="266700"/>
+                <a16:creationId xmlns:a16="http://schemas.microsoft.com/office/drawing/2014/main" id="{D08E6F5D-A0FE-43D3-8D3C-D4423991DD07}"/>
+              </a:ext>
+            </a:extLst>
+          </p:cNvPr>
+          <p:cNvSpPr>
+            <a:spLocks xmlns:a="http://schemas.openxmlformats.org/drawingml/2006/main" noGrp="1"/>
+          </p:cNvSpPr>
+          <p:nvPr/>
+        </p:nvSpPr>
+        <p:spPr>
+          <a:xfrm xmlns:a="http://schemas.openxmlformats.org/drawingml/2006/main" flipH="0" flipV="0">
+            <a:off x="1428750" y="2628900"/>
+            <a:ext cx="0" cy="285750"/>
           </a:xfrm>
           <a:prstGeom xmlns:a="http://schemas.openxmlformats.org/drawingml/2006/main" prst="line">
             <a:avLst/>
@@ -1266,19 +1266,19 @@
           <p:cNvPr id="6" name="">
             <a:extLst xmlns:a="http://schemas.openxmlformats.org/drawingml/2006/main">
               <a:ext uri="{FF2B5EF4-FFF2-40B4-BE49-F238E27FC236}">
-                <a16:creationId xmlns:a16="http://schemas.microsoft.com/office/drawing/2014/main" id="{43F9A0B0-6975-4B5E-A966-2025A4A98C46}"/>
-              </a:ext>
-            </a:extLst>
-          </p:cNvPr>
-          <p:cNvSpPr>
-            <a:spLocks xmlns:a="http://schemas.openxmlformats.org/drawingml/2006/main" noGrp="1"/>
-          </p:cNvSpPr>
-          <p:nvPr/>
-        </p:nvSpPr>
-        <p:spPr>
-          <a:xfrm xmlns:a="http://schemas.openxmlformats.org/drawingml/2006/main" flipV="0">
-            <a:off x="6096000" y="2590800"/>
-            <a:ext cx="0" cy="266700"/>
+                <a16:creationId xmlns:a16="http://schemas.microsoft.com/office/drawing/2014/main" id="{AD7EA3F9-A04C-4475-8D91-A6C9F90A5BCF}"/>
+              </a:ext>
+            </a:extLst>
+          </p:cNvPr>
+          <p:cNvSpPr>
+            <a:spLocks xmlns:a="http://schemas.openxmlformats.org/drawingml/2006/main" noGrp="1"/>
+          </p:cNvSpPr>
+          <p:nvPr/>
+        </p:nvSpPr>
+        <p:spPr>
+          <a:xfrm xmlns:a="http://schemas.openxmlformats.org/drawingml/2006/main" flipH="0" flipV="0">
+            <a:off x="6096000" y="2628900"/>
+            <a:ext cx="0" cy="285750"/>
           </a:xfrm>
           <a:prstGeom xmlns:a="http://schemas.openxmlformats.org/drawingml/2006/main" prst="line">
             <a:avLst/>
@@ -1297,19 +1297,19 @@
           <p:cNvPr id="7" name="">
             <a:extLst xmlns:a="http://schemas.openxmlformats.org/drawingml/2006/main">
               <a:ext uri="{FF2B5EF4-FFF2-40B4-BE49-F238E27FC236}">
-                <a16:creationId xmlns:a16="http://schemas.microsoft.com/office/drawing/2014/main" id="{A6E55376-6C18-4A0E-B29F-2157D3B42384}"/>
-              </a:ext>
-            </a:extLst>
-          </p:cNvPr>
-          <p:cNvSpPr>
-            <a:spLocks xmlns:a="http://schemas.openxmlformats.org/drawingml/2006/main" noGrp="1"/>
-          </p:cNvSpPr>
-          <p:nvPr/>
-        </p:nvSpPr>
-        <p:spPr>
-          <a:xfrm xmlns:a="http://schemas.openxmlformats.org/drawingml/2006/main" flipV="0">
-            <a:off x="10763250" y="2590800"/>
-            <a:ext cx="0" cy="266700"/>
+                <a16:creationId xmlns:a16="http://schemas.microsoft.com/office/drawing/2014/main" id="{1AE7D989-F9D0-4C43-91E2-47DFF1C7F9F6}"/>
+              </a:ext>
+            </a:extLst>
+          </p:cNvPr>
+          <p:cNvSpPr>
+            <a:spLocks xmlns:a="http://schemas.openxmlformats.org/drawingml/2006/main" noGrp="1"/>
+          </p:cNvSpPr>
+          <p:nvPr/>
+        </p:nvSpPr>
+        <p:spPr>
+          <a:xfrm xmlns:a="http://schemas.openxmlformats.org/drawingml/2006/main" flipH="0" flipV="0">
+            <a:off x="10763250" y="2628900"/>
+            <a:ext cx="0" cy="285750"/>
           </a:xfrm>
           <a:prstGeom xmlns:a="http://schemas.openxmlformats.org/drawingml/2006/main" prst="line">
             <a:avLst/>
@@ -1328,28 +1328,28 @@
           <p:cNvPr id="8" name="">
             <a:extLst xmlns:a="http://schemas.openxmlformats.org/drawingml/2006/main">
               <a:ext uri="{FF2B5EF4-FFF2-40B4-BE49-F238E27FC236}">
-                <a16:creationId xmlns:a16="http://schemas.microsoft.com/office/drawing/2014/main" id="{F41560B1-F870-45AF-A306-D94AA98EFA21}"/>
-              </a:ext>
-            </a:extLst>
-          </p:cNvPr>
-          <p:cNvSpPr>
-            <a:spLocks xmlns:a="http://schemas.openxmlformats.org/drawingml/2006/main" noGrp="1"/>
-          </p:cNvSpPr>
-          <p:nvPr/>
-        </p:nvSpPr>
-        <p:spPr>
-          <a:xfrm xmlns:a="http://schemas.openxmlformats.org/drawingml/2006/main" flipV="0">
-            <a:off x="1428750" y="3771900"/>
-            <a:ext cx="0" cy="628650"/>
-          </a:xfrm>
-          <a:prstGeom xmlns:a="http://schemas.openxmlformats.org/drawingml/2006/main" prst="line">
-            <a:avLst/>
-          </a:prstGeom>
-          <a:noFill xmlns:a="http://schemas.openxmlformats.org/drawingml/2006/main"/>
-          <a:ln xmlns:a="http://schemas.openxmlformats.org/drawingml/2006/main" w="19050">
-            <a:solidFill>
-              <a:srgbClr val="00A8D8"/>
-            </a:solidFill>
+                <a16:creationId xmlns:a16="http://schemas.microsoft.com/office/drawing/2014/main" id="{EE2D00C8-90EA-4DBC-9572-04727FED3186}"/>
+              </a:ext>
+            </a:extLst>
+          </p:cNvPr>
+          <p:cNvSpPr>
+            <a:spLocks xmlns:a="http://schemas.openxmlformats.org/drawingml/2006/main" noGrp="1"/>
+          </p:cNvSpPr>
+          <p:nvPr/>
+        </p:nvSpPr>
+        <p:spPr>
+          <a:xfrm xmlns:a="http://schemas.openxmlformats.org/drawingml/2006/main">
+            <a:off x="5562600" y="1200150"/>
+            <a:ext cx="1066800" cy="1066800"/>
+          </a:xfrm>
+          <a:prstGeom xmlns:a="http://schemas.openxmlformats.org/drawingml/2006/main" prst="ellipse">
+            <a:avLst/>
+          </a:prstGeom>
+          <a:solidFill xmlns:a="http://schemas.openxmlformats.org/drawingml/2006/main">
+            <a:srgbClr val="DCE8F4"/>
+          </a:solidFill>
+          <a:ln xmlns:a="http://schemas.openxmlformats.org/drawingml/2006/main" w="0">
+            <a:noFill/>
             <a:prstDash val="solid"/>
           </a:ln>
         </p:spPr>
@@ -1359,379 +1359,7 @@
           <p:cNvPr id="9" name="">
             <a:extLst xmlns:a="http://schemas.openxmlformats.org/drawingml/2006/main">
               <a:ext uri="{FF2B5EF4-FFF2-40B4-BE49-F238E27FC236}">
-                <a16:creationId xmlns:a16="http://schemas.microsoft.com/office/drawing/2014/main" id="{82C4E3F3-464E-4930-9119-8E75D94B985C}"/>
-              </a:ext>
-            </a:extLst>
-          </p:cNvPr>
-          <p:cNvSpPr>
-            <a:spLocks xmlns:a="http://schemas.openxmlformats.org/drawingml/2006/main" noGrp="1"/>
-          </p:cNvSpPr>
-          <p:nvPr/>
-        </p:nvSpPr>
-        <p:spPr>
-          <a:xfrm xmlns:a="http://schemas.openxmlformats.org/drawingml/2006/main" flipV="0">
-            <a:off x="1066800" y="4400550"/>
-            <a:ext cx="723900" cy="0"/>
-          </a:xfrm>
-          <a:prstGeom xmlns:a="http://schemas.openxmlformats.org/drawingml/2006/main" prst="line">
-            <a:avLst/>
-          </a:prstGeom>
-          <a:noFill xmlns:a="http://schemas.openxmlformats.org/drawingml/2006/main"/>
-          <a:ln xmlns:a="http://schemas.openxmlformats.org/drawingml/2006/main" w="19050">
-            <a:solidFill>
-              <a:srgbClr val="00A8D8"/>
-            </a:solidFill>
-            <a:prstDash val="solid"/>
-          </a:ln>
-        </p:spPr>
-      </p:sp>
-      <p:sp>
-        <p:nvSpPr>
-          <p:cNvPr id="10" name="">
-            <a:extLst xmlns:a="http://schemas.openxmlformats.org/drawingml/2006/main">
-              <a:ext uri="{FF2B5EF4-FFF2-40B4-BE49-F238E27FC236}">
-                <a16:creationId xmlns:a16="http://schemas.microsoft.com/office/drawing/2014/main" id="{4C6012F8-D078-4E75-9EF1-D4735102948D}"/>
-              </a:ext>
-            </a:extLst>
-          </p:cNvPr>
-          <p:cNvSpPr>
-            <a:spLocks xmlns:a="http://schemas.openxmlformats.org/drawingml/2006/main" noGrp="1"/>
-          </p:cNvSpPr>
-          <p:nvPr/>
-        </p:nvSpPr>
-        <p:spPr>
-          <a:xfrm xmlns:a="http://schemas.openxmlformats.org/drawingml/2006/main" flipV="0">
-            <a:off x="1066800" y="4400550"/>
-            <a:ext cx="0" cy="495300"/>
-          </a:xfrm>
-          <a:prstGeom xmlns:a="http://schemas.openxmlformats.org/drawingml/2006/main" prst="line">
-            <a:avLst/>
-          </a:prstGeom>
-          <a:noFill xmlns:a="http://schemas.openxmlformats.org/drawingml/2006/main"/>
-          <a:ln xmlns:a="http://schemas.openxmlformats.org/drawingml/2006/main" w="19050">
-            <a:solidFill>
-              <a:srgbClr val="00A8D8"/>
-            </a:solidFill>
-            <a:prstDash val="solid"/>
-          </a:ln>
-        </p:spPr>
-      </p:sp>
-      <p:sp>
-        <p:nvSpPr>
-          <p:cNvPr id="11" name="">
-            <a:extLst xmlns:a="http://schemas.openxmlformats.org/drawingml/2006/main">
-              <a:ext uri="{FF2B5EF4-FFF2-40B4-BE49-F238E27FC236}">
-                <a16:creationId xmlns:a16="http://schemas.microsoft.com/office/drawing/2014/main" id="{8C84595A-578A-4619-A9A7-6296ACF33517}"/>
-              </a:ext>
-            </a:extLst>
-          </p:cNvPr>
-          <p:cNvSpPr>
-            <a:spLocks xmlns:a="http://schemas.openxmlformats.org/drawingml/2006/main" noGrp="1"/>
-          </p:cNvSpPr>
-          <p:nvPr/>
-        </p:nvSpPr>
-        <p:spPr>
-          <a:xfrm xmlns:a="http://schemas.openxmlformats.org/drawingml/2006/main" flipV="0">
-            <a:off x="1790700" y="4400550"/>
-            <a:ext cx="0" cy="495300"/>
-          </a:xfrm>
-          <a:prstGeom xmlns:a="http://schemas.openxmlformats.org/drawingml/2006/main" prst="line">
-            <a:avLst/>
-          </a:prstGeom>
-          <a:noFill xmlns:a="http://schemas.openxmlformats.org/drawingml/2006/main"/>
-          <a:ln xmlns:a="http://schemas.openxmlformats.org/drawingml/2006/main" w="19050">
-            <a:solidFill>
-              <a:srgbClr val="00A8D8"/>
-            </a:solidFill>
-            <a:prstDash val="solid"/>
-          </a:ln>
-        </p:spPr>
-      </p:sp>
-      <p:sp>
-        <p:nvSpPr>
-          <p:cNvPr id="12" name="">
-            <a:extLst xmlns:a="http://schemas.openxmlformats.org/drawingml/2006/main">
-              <a:ext uri="{FF2B5EF4-FFF2-40B4-BE49-F238E27FC236}">
-                <a16:creationId xmlns:a16="http://schemas.microsoft.com/office/drawing/2014/main" id="{F660049C-1A10-44AA-86C7-D699926A5AEB}"/>
-              </a:ext>
-            </a:extLst>
-          </p:cNvPr>
-          <p:cNvSpPr>
-            <a:spLocks xmlns:a="http://schemas.openxmlformats.org/drawingml/2006/main" noGrp="1"/>
-          </p:cNvSpPr>
-          <p:nvPr/>
-        </p:nvSpPr>
-        <p:spPr>
-          <a:xfrm xmlns:a="http://schemas.openxmlformats.org/drawingml/2006/main" flipV="0">
-            <a:off x="6096000" y="3771900"/>
-            <a:ext cx="0" cy="628650"/>
-          </a:xfrm>
-          <a:prstGeom xmlns:a="http://schemas.openxmlformats.org/drawingml/2006/main" prst="line">
-            <a:avLst/>
-          </a:prstGeom>
-          <a:noFill xmlns:a="http://schemas.openxmlformats.org/drawingml/2006/main"/>
-          <a:ln xmlns:a="http://schemas.openxmlformats.org/drawingml/2006/main" w="19050">
-            <a:solidFill>
-              <a:srgbClr val="00A8D8"/>
-            </a:solidFill>
-            <a:prstDash val="solid"/>
-          </a:ln>
-        </p:spPr>
-      </p:sp>
-      <p:sp>
-        <p:nvSpPr>
-          <p:cNvPr id="13" name="">
-            <a:extLst xmlns:a="http://schemas.openxmlformats.org/drawingml/2006/main">
-              <a:ext uri="{FF2B5EF4-FFF2-40B4-BE49-F238E27FC236}">
-                <a16:creationId xmlns:a16="http://schemas.microsoft.com/office/drawing/2014/main" id="{4BB08B7A-266B-47BD-B421-2005C12ADC77}"/>
-              </a:ext>
-            </a:extLst>
-          </p:cNvPr>
-          <p:cNvSpPr>
-            <a:spLocks xmlns:a="http://schemas.openxmlformats.org/drawingml/2006/main" noGrp="1"/>
-          </p:cNvSpPr>
-          <p:nvPr/>
-        </p:nvSpPr>
-        <p:spPr>
-          <a:xfrm xmlns:a="http://schemas.openxmlformats.org/drawingml/2006/main" flipV="0">
-            <a:off x="5372100" y="4400550"/>
-            <a:ext cx="1447800" cy="0"/>
-          </a:xfrm>
-          <a:prstGeom xmlns:a="http://schemas.openxmlformats.org/drawingml/2006/main" prst="line">
-            <a:avLst/>
-          </a:prstGeom>
-          <a:noFill xmlns:a="http://schemas.openxmlformats.org/drawingml/2006/main"/>
-          <a:ln xmlns:a="http://schemas.openxmlformats.org/drawingml/2006/main" w="19050">
-            <a:solidFill>
-              <a:srgbClr val="00A8D8"/>
-            </a:solidFill>
-            <a:prstDash val="solid"/>
-          </a:ln>
-        </p:spPr>
-      </p:sp>
-      <p:sp>
-        <p:nvSpPr>
-          <p:cNvPr id="14" name="">
-            <a:extLst xmlns:a="http://schemas.openxmlformats.org/drawingml/2006/main">
-              <a:ext uri="{FF2B5EF4-FFF2-40B4-BE49-F238E27FC236}">
-                <a16:creationId xmlns:a16="http://schemas.microsoft.com/office/drawing/2014/main" id="{46D8BB59-6EF7-4D6B-AE1A-9492A9D61E8F}"/>
-              </a:ext>
-            </a:extLst>
-          </p:cNvPr>
-          <p:cNvSpPr>
-            <a:spLocks xmlns:a="http://schemas.openxmlformats.org/drawingml/2006/main" noGrp="1"/>
-          </p:cNvSpPr>
-          <p:nvPr/>
-        </p:nvSpPr>
-        <p:spPr>
-          <a:xfrm xmlns:a="http://schemas.openxmlformats.org/drawingml/2006/main" flipV="0">
-            <a:off x="5372100" y="4400550"/>
-            <a:ext cx="0" cy="495300"/>
-          </a:xfrm>
-          <a:prstGeom xmlns:a="http://schemas.openxmlformats.org/drawingml/2006/main" prst="line">
-            <a:avLst/>
-          </a:prstGeom>
-          <a:noFill xmlns:a="http://schemas.openxmlformats.org/drawingml/2006/main"/>
-          <a:ln xmlns:a="http://schemas.openxmlformats.org/drawingml/2006/main" w="19050">
-            <a:solidFill>
-              <a:srgbClr val="00A8D8"/>
-            </a:solidFill>
-            <a:prstDash val="solid"/>
-          </a:ln>
-        </p:spPr>
-      </p:sp>
-      <p:sp>
-        <p:nvSpPr>
-          <p:cNvPr id="15" name="">
-            <a:extLst xmlns:a="http://schemas.openxmlformats.org/drawingml/2006/main">
-              <a:ext uri="{FF2B5EF4-FFF2-40B4-BE49-F238E27FC236}">
-                <a16:creationId xmlns:a16="http://schemas.microsoft.com/office/drawing/2014/main" id="{24D1002C-85AA-43B2-B68A-530C45010A65}"/>
-              </a:ext>
-            </a:extLst>
-          </p:cNvPr>
-          <p:cNvSpPr>
-            <a:spLocks xmlns:a="http://schemas.openxmlformats.org/drawingml/2006/main" noGrp="1"/>
-          </p:cNvSpPr>
-          <p:nvPr/>
-        </p:nvSpPr>
-        <p:spPr>
-          <a:xfrm xmlns:a="http://schemas.openxmlformats.org/drawingml/2006/main" flipV="0">
-            <a:off x="6096000" y="4400550"/>
-            <a:ext cx="0" cy="495300"/>
-          </a:xfrm>
-          <a:prstGeom xmlns:a="http://schemas.openxmlformats.org/drawingml/2006/main" prst="line">
-            <a:avLst/>
-          </a:prstGeom>
-          <a:noFill xmlns:a="http://schemas.openxmlformats.org/drawingml/2006/main"/>
-          <a:ln xmlns:a="http://schemas.openxmlformats.org/drawingml/2006/main" w="19050">
-            <a:solidFill>
-              <a:srgbClr val="00A8D8"/>
-            </a:solidFill>
-            <a:prstDash val="solid"/>
-          </a:ln>
-        </p:spPr>
-      </p:sp>
-      <p:sp>
-        <p:nvSpPr>
-          <p:cNvPr id="16" name="">
-            <a:extLst xmlns:a="http://schemas.openxmlformats.org/drawingml/2006/main">
-              <a:ext uri="{FF2B5EF4-FFF2-40B4-BE49-F238E27FC236}">
-                <a16:creationId xmlns:a16="http://schemas.microsoft.com/office/drawing/2014/main" id="{6C226DE9-8BAD-46CB-81CE-CBE5E1B2D26A}"/>
-              </a:ext>
-            </a:extLst>
-          </p:cNvPr>
-          <p:cNvSpPr>
-            <a:spLocks xmlns:a="http://schemas.openxmlformats.org/drawingml/2006/main" noGrp="1"/>
-          </p:cNvSpPr>
-          <p:nvPr/>
-        </p:nvSpPr>
-        <p:spPr>
-          <a:xfrm xmlns:a="http://schemas.openxmlformats.org/drawingml/2006/main" flipV="0">
-            <a:off x="6819900" y="4400550"/>
-            <a:ext cx="0" cy="495300"/>
-          </a:xfrm>
-          <a:prstGeom xmlns:a="http://schemas.openxmlformats.org/drawingml/2006/main" prst="line">
-            <a:avLst/>
-          </a:prstGeom>
-          <a:noFill xmlns:a="http://schemas.openxmlformats.org/drawingml/2006/main"/>
-          <a:ln xmlns:a="http://schemas.openxmlformats.org/drawingml/2006/main" w="19050">
-            <a:solidFill>
-              <a:srgbClr val="00A8D8"/>
-            </a:solidFill>
-            <a:prstDash val="solid"/>
-          </a:ln>
-        </p:spPr>
-      </p:sp>
-      <p:sp>
-        <p:nvSpPr>
-          <p:cNvPr id="17" name="">
-            <a:extLst xmlns:a="http://schemas.openxmlformats.org/drawingml/2006/main">
-              <a:ext uri="{FF2B5EF4-FFF2-40B4-BE49-F238E27FC236}">
-                <a16:creationId xmlns:a16="http://schemas.microsoft.com/office/drawing/2014/main" id="{25888B41-621B-418B-B5F6-3763F79A005D}"/>
-              </a:ext>
-            </a:extLst>
-          </p:cNvPr>
-          <p:cNvSpPr>
-            <a:spLocks xmlns:a="http://schemas.openxmlformats.org/drawingml/2006/main" noGrp="1"/>
-          </p:cNvSpPr>
-          <p:nvPr/>
-        </p:nvSpPr>
-        <p:spPr>
-          <a:xfrm xmlns:a="http://schemas.openxmlformats.org/drawingml/2006/main" flipV="0">
-            <a:off x="10763250" y="3771900"/>
-            <a:ext cx="0" cy="628650"/>
-          </a:xfrm>
-          <a:prstGeom xmlns:a="http://schemas.openxmlformats.org/drawingml/2006/main" prst="line">
-            <a:avLst/>
-          </a:prstGeom>
-          <a:noFill xmlns:a="http://schemas.openxmlformats.org/drawingml/2006/main"/>
-          <a:ln xmlns:a="http://schemas.openxmlformats.org/drawingml/2006/main" w="19050">
-            <a:solidFill>
-              <a:srgbClr val="00A8D8"/>
-            </a:solidFill>
-            <a:prstDash val="solid"/>
-          </a:ln>
-        </p:spPr>
-      </p:sp>
-      <p:sp>
-        <p:nvSpPr>
-          <p:cNvPr id="18" name="">
-            <a:extLst xmlns:a="http://schemas.openxmlformats.org/drawingml/2006/main">
-              <a:ext uri="{FF2B5EF4-FFF2-40B4-BE49-F238E27FC236}">
-                <a16:creationId xmlns:a16="http://schemas.microsoft.com/office/drawing/2014/main" id="{7BE6778B-DEA5-4E5E-82E5-7FC4694C724E}"/>
-              </a:ext>
-            </a:extLst>
-          </p:cNvPr>
-          <p:cNvSpPr>
-            <a:spLocks xmlns:a="http://schemas.openxmlformats.org/drawingml/2006/main" noGrp="1"/>
-          </p:cNvSpPr>
-          <p:nvPr/>
-        </p:nvSpPr>
-        <p:spPr>
-          <a:xfrm xmlns:a="http://schemas.openxmlformats.org/drawingml/2006/main" flipV="0">
-            <a:off x="10401300" y="4400550"/>
-            <a:ext cx="723900" cy="0"/>
-          </a:xfrm>
-          <a:prstGeom xmlns:a="http://schemas.openxmlformats.org/drawingml/2006/main" prst="line">
-            <a:avLst/>
-          </a:prstGeom>
-          <a:noFill xmlns:a="http://schemas.openxmlformats.org/drawingml/2006/main"/>
-          <a:ln xmlns:a="http://schemas.openxmlformats.org/drawingml/2006/main" w="19050">
-            <a:solidFill>
-              <a:srgbClr val="00A8D8"/>
-            </a:solidFill>
-            <a:prstDash val="solid"/>
-          </a:ln>
-        </p:spPr>
-      </p:sp>
-      <p:sp>
-        <p:nvSpPr>
-          <p:cNvPr id="19" name="">
-            <a:extLst xmlns:a="http://schemas.openxmlformats.org/drawingml/2006/main">
-              <a:ext uri="{FF2B5EF4-FFF2-40B4-BE49-F238E27FC236}">
-                <a16:creationId xmlns:a16="http://schemas.microsoft.com/office/drawing/2014/main" id="{388BB37C-827B-4FFD-B5FD-74B285277573}"/>
-              </a:ext>
-            </a:extLst>
-          </p:cNvPr>
-          <p:cNvSpPr>
-            <a:spLocks xmlns:a="http://schemas.openxmlformats.org/drawingml/2006/main" noGrp="1"/>
-          </p:cNvSpPr>
-          <p:nvPr/>
-        </p:nvSpPr>
-        <p:spPr>
-          <a:xfrm xmlns:a="http://schemas.openxmlformats.org/drawingml/2006/main" flipV="0">
-            <a:off x="10401300" y="4400550"/>
-            <a:ext cx="0" cy="495300"/>
-          </a:xfrm>
-          <a:prstGeom xmlns:a="http://schemas.openxmlformats.org/drawingml/2006/main" prst="line">
-            <a:avLst/>
-          </a:prstGeom>
-          <a:noFill xmlns:a="http://schemas.openxmlformats.org/drawingml/2006/main"/>
-          <a:ln xmlns:a="http://schemas.openxmlformats.org/drawingml/2006/main" w="19050">
-            <a:solidFill>
-              <a:srgbClr val="00A8D8"/>
-            </a:solidFill>
-            <a:prstDash val="solid"/>
-          </a:ln>
-        </p:spPr>
-      </p:sp>
-      <p:sp>
-        <p:nvSpPr>
-          <p:cNvPr id="20" name="">
-            <a:extLst xmlns:a="http://schemas.openxmlformats.org/drawingml/2006/main">
-              <a:ext uri="{FF2B5EF4-FFF2-40B4-BE49-F238E27FC236}">
-                <a16:creationId xmlns:a16="http://schemas.microsoft.com/office/drawing/2014/main" id="{C71F1F45-5B5B-46B9-A142-90EC5B3B7729}"/>
-              </a:ext>
-            </a:extLst>
-          </p:cNvPr>
-          <p:cNvSpPr>
-            <a:spLocks xmlns:a="http://schemas.openxmlformats.org/drawingml/2006/main" noGrp="1"/>
-          </p:cNvSpPr>
-          <p:nvPr/>
-        </p:nvSpPr>
-        <p:spPr>
-          <a:xfrm xmlns:a="http://schemas.openxmlformats.org/drawingml/2006/main" flipV="0">
-            <a:off x="11125200" y="4400550"/>
-            <a:ext cx="0" cy="495300"/>
-          </a:xfrm>
-          <a:prstGeom xmlns:a="http://schemas.openxmlformats.org/drawingml/2006/main" prst="line">
-            <a:avLst/>
-          </a:prstGeom>
-          <a:noFill xmlns:a="http://schemas.openxmlformats.org/drawingml/2006/main"/>
-          <a:ln xmlns:a="http://schemas.openxmlformats.org/drawingml/2006/main" w="19050">
-            <a:solidFill>
-              <a:srgbClr val="00A8D8"/>
-            </a:solidFill>
-            <a:prstDash val="solid"/>
-          </a:ln>
-        </p:spPr>
-      </p:sp>
-      <p:sp>
-        <p:nvSpPr>
-          <p:cNvPr id="21" name="">
-            <a:extLst xmlns:a="http://schemas.openxmlformats.org/drawingml/2006/main">
-              <a:ext uri="{FF2B5EF4-FFF2-40B4-BE49-F238E27FC236}">
-                <a16:creationId xmlns:a16="http://schemas.microsoft.com/office/drawing/2014/main" id="{AD5F5F83-E0EE-4758-83ED-FDA1BB997080}"/>
+                <a16:creationId xmlns:a16="http://schemas.microsoft.com/office/drawing/2014/main" id="{B0FFA0EE-5BF2-4742-8A62-94FFA3C80826}"/>
               </a:ext>
             </a:extLst>
           </p:cNvPr>
@@ -1742,14 +1370,14 @@
         </p:nvSpPr>
         <p:spPr>
           <a:xfrm xmlns:a="http://schemas.openxmlformats.org/drawingml/2006/main">
-            <a:off x="5600700" y="1219200"/>
-            <a:ext cx="990600" cy="990600"/>
+            <a:off x="5676900" y="1314450"/>
+            <a:ext cx="838200" cy="838200"/>
           </a:xfrm>
           <a:prstGeom xmlns:a="http://schemas.openxmlformats.org/drawingml/2006/main" prst="ellipse">
             <a:avLst/>
           </a:prstGeom>
           <a:solidFill xmlns:a="http://schemas.openxmlformats.org/drawingml/2006/main">
-            <a:srgbClr val="DCE6F2"/>
+            <a:srgbClr val="FFFFFF"/>
           </a:solidFill>
           <a:ln xmlns:a="http://schemas.openxmlformats.org/drawingml/2006/main" w="28575">
             <a:solidFill>
@@ -1765,13 +1393,13 @@
           <a:fontRef xmlns:a="http://schemas.openxmlformats.org/drawingml/2006/main" idx="major"/>
         </p:style>
         <p:txBody>
-          <a:bodyPr xmlns:a="http://schemas.openxmlformats.org/drawingml/2006/main" lIns="114300" tIns="76200" rIns="114300" bIns="76200" anchor="ctr">
-            <a:normAutofit fontScale="91650"/>
+          <a:bodyPr xmlns:a="http://schemas.openxmlformats.org/drawingml/2006/main" lIns="0" tIns="0" rIns="0" bIns="0" anchor="ctr">
+            <a:normAutofit fontScale="100000"/>
           </a:bodyPr>
           <a:lstStyle xmlns:a="http://schemas.openxmlformats.org/drawingml/2006/main"/>
           <a:p xmlns:a="http://schemas.openxmlformats.org/drawingml/2006/main">
             <a:pPr algn="ctr">
-              <a:defRPr sz="2025" b="1">
+              <a:defRPr sz="1800" b="1">
                 <a:solidFill>
                   <a:srgbClr val="1677C8"/>
                 </a:solidFill>
@@ -1781,7 +1409,7 @@
               </a:defRPr>
             </a:pPr>
             <a:r>
-              <a:rPr sz="2025" b="1">
+              <a:rPr sz="1800" b="1">
                 <a:solidFill>
                   <a:srgbClr val="1677C8"/>
                 </a:solidFill>
@@ -1796,10 +1424,10 @@
       </p:sp>
       <p:sp>
         <p:nvSpPr>
-          <p:cNvPr id="22" name="">
-            <a:extLst xmlns:a="http://schemas.openxmlformats.org/drawingml/2006/main">
-              <a:ext uri="{FF2B5EF4-FFF2-40B4-BE49-F238E27FC236}">
-                <a16:creationId xmlns:a16="http://schemas.microsoft.com/office/drawing/2014/main" id="{44F195A8-F6D5-4C01-BAC4-9698AE26986B}"/>
+          <p:cNvPr id="10" name="PPAGENT_QA|parent=org-leader|domains=organization-leaders">
+            <a:extLst xmlns:a="http://schemas.openxmlformats.org/drawingml/2006/main">
+              <a:ext uri="{FF2B5EF4-FFF2-40B4-BE49-F238E27FC236}">
+                <a16:creationId xmlns:a16="http://schemas.microsoft.com/office/drawing/2014/main" id="{9981DC1B-9E0C-4F37-887F-6895D102B437}"/>
               </a:ext>
             </a:extLst>
           </p:cNvPr>
@@ -1810,12 +1438,12 @@
         </p:nvSpPr>
         <p:spPr>
           <a:xfrm xmlns:a="http://schemas.openxmlformats.org/drawingml/2006/main">
-            <a:off x="5048250" y="2266950"/>
-            <a:ext cx="2095500" cy="361950"/>
+            <a:off x="5010150" y="2171700"/>
+            <a:ext cx="2171700" cy="381000"/>
           </a:xfrm>
           <a:prstGeom xmlns:a="http://schemas.openxmlformats.org/drawingml/2006/main" prst="roundRect">
             <a:avLst>
-              <a:gd name="adj" fmla="val 31579"/>
+              <a:gd name="adj" fmla="val 30000"/>
             </a:avLst>
           </a:prstGeom>
           <a:solidFill xmlns:a="http://schemas.openxmlformats.org/drawingml/2006/main">
@@ -1823,68 +1451,6 @@
           </a:solidFill>
           <a:ln xmlns:a="http://schemas.openxmlformats.org/drawingml/2006/main" w="0">
             <a:noFill/>
-            <a:prstDash val="solid"/>
-          </a:ln>
-        </p:spPr>
-        <p:txBody>
-          <a:bodyPr xmlns:a="http://schemas.openxmlformats.org/drawingml/2006/main" lIns="76200" tIns="28575" rIns="76200" bIns="28575" anchor="ctr">
-            <a:normAutofit fontScale="100000"/>
-          </a:bodyPr>
-          <a:lstStyle xmlns:a="http://schemas.openxmlformats.org/drawingml/2006/main"/>
-          <a:p xmlns:a="http://schemas.openxmlformats.org/drawingml/2006/main">
-            <a:pPr algn="ctr">
-              <a:defRPr sz="1200" b="1">
-                <a:solidFill>
-                  <a:srgbClr val="FFFFFF"/>
-                </a:solidFill>
-                <a:latin typeface="Microsoft YaHei"/>
-                <a:ea typeface="Microsoft YaHei"/>
-                <a:cs typeface="Microsoft YaHei"/>
-              </a:defRPr>
-            </a:pPr>
-            <a:r>
-              <a:rPr sz="1200" b="1">
-                <a:solidFill>
-                  <a:srgbClr val="FFFFFF"/>
-                </a:solidFill>
-                <a:latin typeface="Microsoft YaHei"/>
-                <a:ea typeface="Microsoft YaHei"/>
-                <a:cs typeface="Microsoft YaHei"/>
-              </a:rPr>
-              <a:t>李明｜项目负责人</a:t>
-            </a:r>
-          </a:p>
-        </p:txBody>
-      </p:sp>
-      <p:sp>
-        <p:nvSpPr>
-          <p:cNvPr id="23" name="">
-            <a:extLst xmlns:a="http://schemas.openxmlformats.org/drawingml/2006/main">
-              <a:ext uri="{FF2B5EF4-FFF2-40B4-BE49-F238E27FC236}">
-                <a16:creationId xmlns:a16="http://schemas.microsoft.com/office/drawing/2014/main" id="{11E35A12-90F1-4219-B241-8C8B4F334A94}"/>
-              </a:ext>
-            </a:extLst>
-          </p:cNvPr>
-          <p:cNvSpPr>
-            <a:spLocks xmlns:a="http://schemas.openxmlformats.org/drawingml/2006/main" noGrp="1"/>
-          </p:cNvSpPr>
-          <p:nvPr/>
-        </p:nvSpPr>
-        <p:spPr>
-          <a:xfrm xmlns:a="http://schemas.openxmlformats.org/drawingml/2006/main">
-            <a:off x="990600" y="2876550"/>
-            <a:ext cx="876300" cy="876300"/>
-          </a:xfrm>
-          <a:prstGeom xmlns:a="http://schemas.openxmlformats.org/drawingml/2006/main" prst="ellipse">
-            <a:avLst/>
-          </a:prstGeom>
-          <a:solidFill xmlns:a="http://schemas.openxmlformats.org/drawingml/2006/main">
-            <a:srgbClr val="EAF2FA"/>
-          </a:solidFill>
-          <a:ln xmlns:a="http://schemas.openxmlformats.org/drawingml/2006/main" w="23813">
-            <a:solidFill>
-              <a:srgbClr val="1677C8"/>
-            </a:solidFill>
             <a:prstDash val="solid"/>
           </a:ln>
         </p:spPr>
@@ -1895,15 +1461,15 @@
           <a:fontRef xmlns:a="http://schemas.openxmlformats.org/drawingml/2006/main" idx="major"/>
         </p:style>
         <p:txBody>
-          <a:bodyPr xmlns:a="http://schemas.openxmlformats.org/drawingml/2006/main" lIns="114300" tIns="76200" rIns="114300" bIns="76200" anchor="ctr">
-            <a:normAutofit fontScale="85769"/>
+          <a:bodyPr xmlns:a="http://schemas.openxmlformats.org/drawingml/2006/main" lIns="76200" tIns="19050" rIns="76200" bIns="19050" anchor="ctr">
+            <a:normAutofit fontScale="100000"/>
           </a:bodyPr>
           <a:lstStyle xmlns:a="http://schemas.openxmlformats.org/drawingml/2006/main"/>
           <a:p xmlns:a="http://schemas.openxmlformats.org/drawingml/2006/main">
             <a:pPr algn="ctr">
-              <a:defRPr sz="1800" b="1">
-                <a:solidFill>
-                  <a:srgbClr val="1677C8"/>
+              <a:defRPr sz="1200" b="1">
+                <a:solidFill>
+                  <a:srgbClr val="FFFFFF"/>
                 </a:solidFill>
                 <a:latin typeface="Microsoft YaHei"/>
                 <a:ea typeface="Microsoft YaHei"/>
@@ -1911,7 +1477,230 @@
               </a:defRPr>
             </a:pPr>
             <a:r>
-              <a:rPr sz="1800" b="1">
+              <a:rPr sz="1200" b="1">
+                <a:solidFill>
+                  <a:srgbClr val="FFFFFF"/>
+                </a:solidFill>
+                <a:latin typeface="Microsoft YaHei"/>
+                <a:ea typeface="Microsoft YaHei"/>
+                <a:cs typeface="Microsoft YaHei"/>
+              </a:rPr>
+              <a:t>李明｜项目负责人</a:t>
+            </a:r>
+          </a:p>
+        </p:txBody>
+      </p:sp>
+      <p:sp>
+        <p:nvSpPr>
+          <p:cNvPr id="11" name="">
+            <a:extLst xmlns:a="http://schemas.openxmlformats.org/drawingml/2006/main">
+              <a:ext uri="{FF2B5EF4-FFF2-40B4-BE49-F238E27FC236}">
+                <a16:creationId xmlns:a16="http://schemas.microsoft.com/office/drawing/2014/main" id="{CB81266E-BB7E-4694-B02A-91EA76E5EEAF}"/>
+              </a:ext>
+            </a:extLst>
+          </p:cNvPr>
+          <p:cNvSpPr>
+            <a:spLocks xmlns:a="http://schemas.openxmlformats.org/drawingml/2006/main" noGrp="1"/>
+          </p:cNvSpPr>
+          <p:nvPr/>
+        </p:nvSpPr>
+        <p:spPr>
+          <a:xfrm xmlns:a="http://schemas.openxmlformats.org/drawingml/2006/main" flipH="0" flipV="0">
+            <a:off x="1428750" y="3771900"/>
+            <a:ext cx="0" cy="704850"/>
+          </a:xfrm>
+          <a:prstGeom xmlns:a="http://schemas.openxmlformats.org/drawingml/2006/main" prst="line">
+            <a:avLst/>
+          </a:prstGeom>
+          <a:noFill xmlns:a="http://schemas.openxmlformats.org/drawingml/2006/main"/>
+          <a:ln xmlns:a="http://schemas.openxmlformats.org/drawingml/2006/main" w="19050">
+            <a:solidFill>
+              <a:srgbClr val="E3AF45"/>
+            </a:solidFill>
+            <a:prstDash val="solid"/>
+          </a:ln>
+        </p:spPr>
+      </p:sp>
+      <p:sp>
+        <p:nvSpPr>
+          <p:cNvPr id="12" name="">
+            <a:extLst xmlns:a="http://schemas.openxmlformats.org/drawingml/2006/main">
+              <a:ext uri="{FF2B5EF4-FFF2-40B4-BE49-F238E27FC236}">
+                <a16:creationId xmlns:a16="http://schemas.microsoft.com/office/drawing/2014/main" id="{E30BE9D6-5DBA-4B22-816E-0478631E38AD}"/>
+              </a:ext>
+            </a:extLst>
+          </p:cNvPr>
+          <p:cNvSpPr>
+            <a:spLocks xmlns:a="http://schemas.openxmlformats.org/drawingml/2006/main" noGrp="1"/>
+          </p:cNvSpPr>
+          <p:nvPr/>
+        </p:nvSpPr>
+        <p:spPr>
+          <a:xfrm xmlns:a="http://schemas.openxmlformats.org/drawingml/2006/main" flipH="0" flipV="0">
+            <a:off x="1038225" y="4476750"/>
+            <a:ext cx="781050" cy="0"/>
+          </a:xfrm>
+          <a:prstGeom xmlns:a="http://schemas.openxmlformats.org/drawingml/2006/main" prst="line">
+            <a:avLst/>
+          </a:prstGeom>
+          <a:noFill xmlns:a="http://schemas.openxmlformats.org/drawingml/2006/main"/>
+          <a:ln xmlns:a="http://schemas.openxmlformats.org/drawingml/2006/main" w="19050">
+            <a:solidFill>
+              <a:srgbClr val="E3AF45"/>
+            </a:solidFill>
+            <a:prstDash val="solid"/>
+          </a:ln>
+        </p:spPr>
+      </p:sp>
+      <p:sp>
+        <p:nvSpPr>
+          <p:cNvPr id="13" name="">
+            <a:extLst xmlns:a="http://schemas.openxmlformats.org/drawingml/2006/main">
+              <a:ext uri="{FF2B5EF4-FFF2-40B4-BE49-F238E27FC236}">
+                <a16:creationId xmlns:a16="http://schemas.microsoft.com/office/drawing/2014/main" id="{2172FCED-D218-4111-85A0-C59029BD44C4}"/>
+              </a:ext>
+            </a:extLst>
+          </p:cNvPr>
+          <p:cNvSpPr>
+            <a:spLocks xmlns:a="http://schemas.openxmlformats.org/drawingml/2006/main" noGrp="1"/>
+          </p:cNvSpPr>
+          <p:nvPr/>
+        </p:nvSpPr>
+        <p:spPr>
+          <a:xfrm xmlns:a="http://schemas.openxmlformats.org/drawingml/2006/main" flipH="0" flipV="0">
+            <a:off x="1038225" y="4476750"/>
+            <a:ext cx="0" cy="333375"/>
+          </a:xfrm>
+          <a:prstGeom xmlns:a="http://schemas.openxmlformats.org/drawingml/2006/main" prst="line">
+            <a:avLst/>
+          </a:prstGeom>
+          <a:noFill xmlns:a="http://schemas.openxmlformats.org/drawingml/2006/main"/>
+          <a:ln xmlns:a="http://schemas.openxmlformats.org/drawingml/2006/main" w="19050">
+            <a:solidFill>
+              <a:srgbClr val="E3AF45"/>
+            </a:solidFill>
+            <a:prstDash val="solid"/>
+          </a:ln>
+        </p:spPr>
+      </p:sp>
+      <p:sp>
+        <p:nvSpPr>
+          <p:cNvPr id="14" name="">
+            <a:extLst xmlns:a="http://schemas.openxmlformats.org/drawingml/2006/main">
+              <a:ext uri="{FF2B5EF4-FFF2-40B4-BE49-F238E27FC236}">
+                <a16:creationId xmlns:a16="http://schemas.microsoft.com/office/drawing/2014/main" id="{9E23F9E6-6EB5-4ED2-87DD-A821F1200089}"/>
+              </a:ext>
+            </a:extLst>
+          </p:cNvPr>
+          <p:cNvSpPr>
+            <a:spLocks xmlns:a="http://schemas.openxmlformats.org/drawingml/2006/main" noGrp="1"/>
+          </p:cNvSpPr>
+          <p:nvPr/>
+        </p:nvSpPr>
+        <p:spPr>
+          <a:xfrm xmlns:a="http://schemas.openxmlformats.org/drawingml/2006/main" flipH="0" flipV="0">
+            <a:off x="1819275" y="4476750"/>
+            <a:ext cx="0" cy="333375"/>
+          </a:xfrm>
+          <a:prstGeom xmlns:a="http://schemas.openxmlformats.org/drawingml/2006/main" prst="line">
+            <a:avLst/>
+          </a:prstGeom>
+          <a:noFill xmlns:a="http://schemas.openxmlformats.org/drawingml/2006/main"/>
+          <a:ln xmlns:a="http://schemas.openxmlformats.org/drawingml/2006/main" w="19050">
+            <a:solidFill>
+              <a:srgbClr val="E3AF45"/>
+            </a:solidFill>
+            <a:prstDash val="solid"/>
+          </a:ln>
+        </p:spPr>
+      </p:sp>
+      <p:sp>
+        <p:nvSpPr>
+          <p:cNvPr id="15" name="">
+            <a:extLst xmlns:a="http://schemas.openxmlformats.org/drawingml/2006/main">
+              <a:ext uri="{FF2B5EF4-FFF2-40B4-BE49-F238E27FC236}">
+                <a16:creationId xmlns:a16="http://schemas.microsoft.com/office/drawing/2014/main" id="{89942321-2502-4053-9B09-ABF1D30CEF0F}"/>
+              </a:ext>
+            </a:extLst>
+          </p:cNvPr>
+          <p:cNvSpPr>
+            <a:spLocks xmlns:a="http://schemas.openxmlformats.org/drawingml/2006/main" noGrp="1"/>
+          </p:cNvSpPr>
+          <p:nvPr/>
+        </p:nvSpPr>
+        <p:spPr>
+          <a:xfrm xmlns:a="http://schemas.openxmlformats.org/drawingml/2006/main">
+            <a:off x="952500" y="2857500"/>
+            <a:ext cx="952500" cy="952500"/>
+          </a:xfrm>
+          <a:prstGeom xmlns:a="http://schemas.openxmlformats.org/drawingml/2006/main" prst="ellipse">
+            <a:avLst/>
+          </a:prstGeom>
+          <a:solidFill xmlns:a="http://schemas.openxmlformats.org/drawingml/2006/main">
+            <a:srgbClr val="E4EDF6"/>
+          </a:solidFill>
+          <a:ln xmlns:a="http://schemas.openxmlformats.org/drawingml/2006/main" w="0">
+            <a:noFill/>
+            <a:prstDash val="solid"/>
+          </a:ln>
+        </p:spPr>
+      </p:sp>
+      <p:sp>
+        <p:nvSpPr>
+          <p:cNvPr id="16" name="">
+            <a:extLst xmlns:a="http://schemas.openxmlformats.org/drawingml/2006/main">
+              <a:ext uri="{FF2B5EF4-FFF2-40B4-BE49-F238E27FC236}">
+                <a16:creationId xmlns:a16="http://schemas.microsoft.com/office/drawing/2014/main" id="{67F82A19-F133-4B53-BE09-FB1B12CDD349}"/>
+              </a:ext>
+            </a:extLst>
+          </p:cNvPr>
+          <p:cNvSpPr>
+            <a:spLocks xmlns:a="http://schemas.openxmlformats.org/drawingml/2006/main" noGrp="1"/>
+          </p:cNvSpPr>
+          <p:nvPr/>
+        </p:nvSpPr>
+        <p:spPr>
+          <a:xfrm xmlns:a="http://schemas.openxmlformats.org/drawingml/2006/main">
+            <a:off x="1047750" y="2952750"/>
+            <a:ext cx="762000" cy="762000"/>
+          </a:xfrm>
+          <a:prstGeom xmlns:a="http://schemas.openxmlformats.org/drawingml/2006/main" prst="ellipse">
+            <a:avLst/>
+          </a:prstGeom>
+          <a:solidFill xmlns:a="http://schemas.openxmlformats.org/drawingml/2006/main">
+            <a:srgbClr val="FFFFFF"/>
+          </a:solidFill>
+          <a:ln xmlns:a="http://schemas.openxmlformats.org/drawingml/2006/main" w="23813">
+            <a:solidFill>
+              <a:srgbClr val="1677C8"/>
+            </a:solidFill>
+            <a:prstDash val="solid"/>
+          </a:ln>
+        </p:spPr>
+        <p:style>
+          <a:lnRef xmlns:a="http://schemas.openxmlformats.org/drawingml/2006/main" idx="0"/>
+          <a:fillRef xmlns:a="http://schemas.openxmlformats.org/drawingml/2006/main" idx="0"/>
+          <a:effectRef xmlns:a="http://schemas.openxmlformats.org/drawingml/2006/main" idx="6"/>
+          <a:fontRef xmlns:a="http://schemas.openxmlformats.org/drawingml/2006/main" idx="major"/>
+        </p:style>
+        <p:txBody>
+          <a:bodyPr xmlns:a="http://schemas.openxmlformats.org/drawingml/2006/main" lIns="0" tIns="0" rIns="0" bIns="0" anchor="ctr">
+            <a:normAutofit fontScale="100000"/>
+          </a:bodyPr>
+          <a:lstStyle xmlns:a="http://schemas.openxmlformats.org/drawingml/2006/main"/>
+          <a:p xmlns:a="http://schemas.openxmlformats.org/drawingml/2006/main">
+            <a:pPr algn="ctr">
+              <a:defRPr sz="1575" b="1">
+                <a:solidFill>
+                  <a:srgbClr val="1677C8"/>
+                </a:solidFill>
+                <a:latin typeface="Microsoft YaHei"/>
+                <a:ea typeface="Microsoft YaHei"/>
+                <a:cs typeface="Microsoft YaHei"/>
+              </a:defRPr>
+            </a:pPr>
+            <a:r>
+              <a:rPr sz="1575" b="1">
                 <a:solidFill>
                   <a:srgbClr val="1677C8"/>
                 </a:solidFill>
@@ -1926,10 +1715,10 @@
       </p:sp>
       <p:sp>
         <p:nvSpPr>
-          <p:cNvPr id="24" name="">
-            <a:extLst xmlns:a="http://schemas.openxmlformats.org/drawingml/2006/main">
-              <a:ext uri="{FF2B5EF4-FFF2-40B4-BE49-F238E27FC236}">
-                <a16:creationId xmlns:a16="http://schemas.microsoft.com/office/drawing/2014/main" id="{B22E51E8-79F8-49E7-961F-0E9ED521BC27}"/>
+          <p:cNvPr id="17" name="PPAGENT_QA|parent=org-department-0|domains=organization-departments">
+            <a:extLst xmlns:a="http://schemas.openxmlformats.org/drawingml/2006/main">
+              <a:ext uri="{FF2B5EF4-FFF2-40B4-BE49-F238E27FC236}">
+                <a16:creationId xmlns:a16="http://schemas.microsoft.com/office/drawing/2014/main" id="{DD86D0CC-04EB-4AB0-B182-14D00BB7DD3D}"/>
               </a:ext>
             </a:extLst>
           </p:cNvPr>
@@ -1940,12 +1729,12 @@
         </p:nvSpPr>
         <p:spPr>
           <a:xfrm xmlns:a="http://schemas.openxmlformats.org/drawingml/2006/main">
-            <a:off x="476250" y="3810000"/>
-            <a:ext cx="1905000" cy="342900"/>
+            <a:off x="400050" y="3810000"/>
+            <a:ext cx="2057400" cy="361950"/>
           </a:xfrm>
           <a:prstGeom xmlns:a="http://schemas.openxmlformats.org/drawingml/2006/main" prst="roundRect">
             <a:avLst>
-              <a:gd name="adj" fmla="val 33333"/>
+              <a:gd name="adj" fmla="val 31579"/>
             </a:avLst>
           </a:prstGeom>
           <a:solidFill xmlns:a="http://schemas.openxmlformats.org/drawingml/2006/main">
@@ -1953,68 +1742,6 @@
           </a:solidFill>
           <a:ln xmlns:a="http://schemas.openxmlformats.org/drawingml/2006/main" w="0">
             <a:noFill/>
-            <a:prstDash val="solid"/>
-          </a:ln>
-        </p:spPr>
-        <p:txBody>
-          <a:bodyPr xmlns:a="http://schemas.openxmlformats.org/drawingml/2006/main" lIns="47625" tIns="19050" rIns="47625" bIns="19050" anchor="ctr">
-            <a:normAutofit fontScale="100000"/>
-          </a:bodyPr>
-          <a:lstStyle xmlns:a="http://schemas.openxmlformats.org/drawingml/2006/main"/>
-          <a:p xmlns:a="http://schemas.openxmlformats.org/drawingml/2006/main">
-            <a:pPr algn="ctr">
-              <a:defRPr sz="1050" b="1">
-                <a:solidFill>
-                  <a:srgbClr val="FFFFFF"/>
-                </a:solidFill>
-                <a:latin typeface="Microsoft YaHei"/>
-                <a:ea typeface="Microsoft YaHei"/>
-                <a:cs typeface="Microsoft YaHei"/>
-              </a:defRPr>
-            </a:pPr>
-            <a:r>
-              <a:rPr sz="1050" b="1">
-                <a:solidFill>
-                  <a:srgbClr val="FFFFFF"/>
-                </a:solidFill>
-                <a:latin typeface="Microsoft YaHei"/>
-                <a:ea typeface="Microsoft YaHei"/>
-                <a:cs typeface="Microsoft YaHei"/>
-              </a:rPr>
-              <a:t>吴飞｜产品组</a:t>
-            </a:r>
-          </a:p>
-        </p:txBody>
-      </p:sp>
-      <p:sp>
-        <p:nvSpPr>
-          <p:cNvPr id="25" name="">
-            <a:extLst xmlns:a="http://schemas.openxmlformats.org/drawingml/2006/main">
-              <a:ext uri="{FF2B5EF4-FFF2-40B4-BE49-F238E27FC236}">
-                <a16:creationId xmlns:a16="http://schemas.microsoft.com/office/drawing/2014/main" id="{838B022E-6CBE-4BBD-9CAA-4CC0EFBAFACB}"/>
-              </a:ext>
-            </a:extLst>
-          </p:cNvPr>
-          <p:cNvSpPr>
-            <a:spLocks xmlns:a="http://schemas.openxmlformats.org/drawingml/2006/main" noGrp="1"/>
-          </p:cNvSpPr>
-          <p:nvPr/>
-        </p:nvSpPr>
-        <p:spPr>
-          <a:xfrm xmlns:a="http://schemas.openxmlformats.org/drawingml/2006/main">
-            <a:off x="752475" y="4905375"/>
-            <a:ext cx="628650" cy="628650"/>
-          </a:xfrm>
-          <a:prstGeom xmlns:a="http://schemas.openxmlformats.org/drawingml/2006/main" prst="ellipse">
-            <a:avLst/>
-          </a:prstGeom>
-          <a:solidFill xmlns:a="http://schemas.openxmlformats.org/drawingml/2006/main">
-            <a:srgbClr val="FFFFFF"/>
-          </a:solidFill>
-          <a:ln xmlns:a="http://schemas.openxmlformats.org/drawingml/2006/main" w="19050">
-            <a:solidFill>
-              <a:srgbClr val="00A8D8"/>
-            </a:solidFill>
             <a:prstDash val="solid"/>
           </a:ln>
         </p:spPr>
@@ -2025,15 +1752,15 @@
           <a:fontRef xmlns:a="http://schemas.openxmlformats.org/drawingml/2006/main" idx="major"/>
         </p:style>
         <p:txBody>
-          <a:bodyPr xmlns:a="http://schemas.openxmlformats.org/drawingml/2006/main" lIns="114300" tIns="76200" rIns="114300" bIns="76200" anchor="ctr">
-            <a:normAutofit fontScale="70993"/>
+          <a:bodyPr xmlns:a="http://schemas.openxmlformats.org/drawingml/2006/main" lIns="57150" tIns="19050" rIns="57150" bIns="19050" anchor="ctr">
+            <a:normAutofit fontScale="100000"/>
           </a:bodyPr>
           <a:lstStyle xmlns:a="http://schemas.openxmlformats.org/drawingml/2006/main"/>
           <a:p xmlns:a="http://schemas.openxmlformats.org/drawingml/2006/main">
             <a:pPr algn="ctr">
-              <a:defRPr sz="1350" b="1">
-                <a:solidFill>
-                  <a:srgbClr val="00A8D8"/>
+              <a:defRPr sz="1200" b="1">
+                <a:solidFill>
+                  <a:srgbClr val="FFFFFF"/>
                 </a:solidFill>
                 <a:latin typeface="Microsoft YaHei"/>
                 <a:ea typeface="Microsoft YaHei"/>
@@ -2041,25 +1768,25 @@
               </a:defRPr>
             </a:pPr>
             <a:r>
-              <a:rPr sz="1350" b="1">
-                <a:solidFill>
-                  <a:srgbClr val="00A8D8"/>
+              <a:rPr sz="1200" b="1">
+                <a:solidFill>
+                  <a:srgbClr val="FFFFFF"/>
                 </a:solidFill>
                 <a:latin typeface="Microsoft YaHei"/>
                 <a:ea typeface="Microsoft YaHei"/>
                 <a:cs typeface="Microsoft YaHei"/>
               </a:rPr>
-              <a:t>苏芳</a:t>
+              <a:t>吴飞｜产品组</a:t>
             </a:r>
           </a:p>
         </p:txBody>
       </p:sp>
       <p:sp>
         <p:nvSpPr>
-          <p:cNvPr id="26" name="">
-            <a:extLst xmlns:a="http://schemas.openxmlformats.org/drawingml/2006/main">
-              <a:ext uri="{FF2B5EF4-FFF2-40B4-BE49-F238E27FC236}">
-                <a16:creationId xmlns:a16="http://schemas.microsoft.com/office/drawing/2014/main" id="{BF4F19C0-5260-4601-894B-9BD066C7B242}"/>
+          <p:cNvPr id="18" name="">
+            <a:extLst xmlns:a="http://schemas.openxmlformats.org/drawingml/2006/main">
+              <a:ext uri="{FF2B5EF4-FFF2-40B4-BE49-F238E27FC236}">
+                <a16:creationId xmlns:a16="http://schemas.microsoft.com/office/drawing/2014/main" id="{0485E26A-954C-4C0F-B58F-49454C4F4CA6}"/>
               </a:ext>
             </a:extLst>
           </p:cNvPr>
@@ -2070,93 +1797,8 @@
         </p:nvSpPr>
         <p:spPr>
           <a:xfrm xmlns:a="http://schemas.openxmlformats.org/drawingml/2006/main">
-            <a:off x="552450" y="5600700"/>
-            <a:ext cx="1028700" cy="323850"/>
-          </a:xfrm>
-          <a:prstGeom xmlns:a="http://schemas.openxmlformats.org/drawingml/2006/main" prst="roundRect">
-            <a:avLst>
-              <a:gd name="adj" fmla="val 35294"/>
-            </a:avLst>
-          </a:prstGeom>
-          <a:solidFill xmlns:a="http://schemas.openxmlformats.org/drawingml/2006/main">
-            <a:srgbClr val="EEF4FA"/>
-          </a:solidFill>
-          <a:ln xmlns:a="http://schemas.openxmlformats.org/drawingml/2006/main" w="0">
-            <a:noFill/>
-            <a:prstDash val="solid"/>
-          </a:ln>
-        </p:spPr>
-        <p:txBody>
-          <a:bodyPr xmlns:a="http://schemas.openxmlformats.org/drawingml/2006/main" lIns="28575" tIns="19050" rIns="28575" bIns="19050" anchor="ctr">
-            <a:normAutofit fontScale="95711"/>
-          </a:bodyPr>
-          <a:lstStyle xmlns:a="http://schemas.openxmlformats.org/drawingml/2006/main"/>
-          <a:p xmlns:a="http://schemas.openxmlformats.org/drawingml/2006/main">
-            <a:pPr algn="ctr">
-              <a:defRPr sz="750" b="0">
-                <a:solidFill>
-                  <a:srgbClr val="475569"/>
-                </a:solidFill>
-                <a:latin typeface="Microsoft YaHei"/>
-                <a:ea typeface="Microsoft YaHei"/>
-                <a:cs typeface="Microsoft YaHei"/>
-              </a:defRPr>
-            </a:pPr>
-            <a:r>
-              <a:rPr sz="750" b="0">
-                <a:solidFill>
-                  <a:srgbClr val="475569"/>
-                </a:solidFill>
-                <a:latin typeface="Microsoft YaHei"/>
-                <a:ea typeface="Microsoft YaHei"/>
-                <a:cs typeface="Microsoft YaHei"/>
-              </a:rPr>
-              <a:t>苏芳</a:t>
-            </a:r>
-          </a:p>
-          <a:p xmlns:a="http://schemas.openxmlformats.org/drawingml/2006/main">
-            <a:pPr algn="ctr">
-              <a:defRPr sz="750" b="0">
-                <a:solidFill>
-                  <a:srgbClr val="475569"/>
-                </a:solidFill>
-                <a:latin typeface="Microsoft YaHei"/>
-                <a:ea typeface="Microsoft YaHei"/>
-                <a:cs typeface="Microsoft YaHei"/>
-              </a:defRPr>
-            </a:pPr>
-            <a:r>
-              <a:rPr sz="750" b="0">
-                <a:solidFill>
-                  <a:srgbClr val="475569"/>
-                </a:solidFill>
-                <a:latin typeface="Microsoft YaHei"/>
-                <a:ea typeface="Microsoft YaHei"/>
-                <a:cs typeface="Microsoft YaHei"/>
-              </a:rPr>
-              <a:t>需求</a:t>
-            </a:r>
-          </a:p>
-        </p:txBody>
-      </p:sp>
-      <p:sp>
-        <p:nvSpPr>
-          <p:cNvPr id="27" name="">
-            <a:extLst xmlns:a="http://schemas.openxmlformats.org/drawingml/2006/main">
-              <a:ext uri="{FF2B5EF4-FFF2-40B4-BE49-F238E27FC236}">
-                <a16:creationId xmlns:a16="http://schemas.microsoft.com/office/drawing/2014/main" id="{441090DF-A3C1-4DD9-8F94-9D2763E2D222}"/>
-              </a:ext>
-            </a:extLst>
-          </p:cNvPr>
-          <p:cNvSpPr>
-            <a:spLocks xmlns:a="http://schemas.openxmlformats.org/drawingml/2006/main" noGrp="1"/>
-          </p:cNvSpPr>
-          <p:nvPr/>
-        </p:nvSpPr>
-        <p:spPr>
-          <a:xfrm xmlns:a="http://schemas.openxmlformats.org/drawingml/2006/main">
-            <a:off x="1476375" y="4905375"/>
-            <a:ext cx="628650" cy="628650"/>
+            <a:off x="752475" y="4810125"/>
+            <a:ext cx="571500" cy="571500"/>
           </a:xfrm>
           <a:prstGeom xmlns:a="http://schemas.openxmlformats.org/drawingml/2006/main" prst="ellipse">
             <a:avLst/>
@@ -2164,9 +1806,9 @@
           <a:solidFill xmlns:a="http://schemas.openxmlformats.org/drawingml/2006/main">
             <a:srgbClr val="FFFFFF"/>
           </a:solidFill>
-          <a:ln xmlns:a="http://schemas.openxmlformats.org/drawingml/2006/main" w="19050">
+          <a:ln xmlns:a="http://schemas.openxmlformats.org/drawingml/2006/main" w="23813">
             <a:solidFill>
-              <a:srgbClr val="00A8D8"/>
+              <a:srgbClr val="E3AF45"/>
             </a:solidFill>
             <a:prstDash val="solid"/>
           </a:ln>
@@ -2178,15 +1820,15 @@
           <a:fontRef xmlns:a="http://schemas.openxmlformats.org/drawingml/2006/main" idx="major"/>
         </p:style>
         <p:txBody>
-          <a:bodyPr xmlns:a="http://schemas.openxmlformats.org/drawingml/2006/main" lIns="114300" tIns="76200" rIns="114300" bIns="76200" anchor="ctr">
-            <a:normAutofit fontScale="70993"/>
+          <a:bodyPr xmlns:a="http://schemas.openxmlformats.org/drawingml/2006/main" lIns="0" tIns="0" rIns="0" bIns="0" anchor="ctr">
+            <a:normAutofit fontScale="100000"/>
           </a:bodyPr>
           <a:lstStyle xmlns:a="http://schemas.openxmlformats.org/drawingml/2006/main"/>
           <a:p xmlns:a="http://schemas.openxmlformats.org/drawingml/2006/main">
             <a:pPr algn="ctr">
-              <a:defRPr sz="1350" b="1">
-                <a:solidFill>
-                  <a:srgbClr val="00A8D8"/>
+              <a:defRPr sz="1275" b="1">
+                <a:solidFill>
+                  <a:srgbClr val="1677C8"/>
                 </a:solidFill>
                 <a:latin typeface="Microsoft YaHei"/>
                 <a:ea typeface="Microsoft YaHei"/>
@@ -2194,25 +1836,25 @@
               </a:defRPr>
             </a:pPr>
             <a:r>
-              <a:rPr sz="1350" b="1">
-                <a:solidFill>
-                  <a:srgbClr val="00A8D8"/>
+              <a:rPr sz="1275" b="1">
+                <a:solidFill>
+                  <a:srgbClr val="1677C8"/>
                 </a:solidFill>
                 <a:latin typeface="Microsoft YaHei"/>
                 <a:ea typeface="Microsoft YaHei"/>
                 <a:cs typeface="Microsoft YaHei"/>
               </a:rPr>
-              <a:t>江源</a:t>
+              <a:t>苏芳</a:t>
             </a:r>
           </a:p>
         </p:txBody>
       </p:sp>
       <p:sp>
         <p:nvSpPr>
-          <p:cNvPr id="28" name="">
-            <a:extLst xmlns:a="http://schemas.openxmlformats.org/drawingml/2006/main">
-              <a:ext uri="{FF2B5EF4-FFF2-40B4-BE49-F238E27FC236}">
-                <a16:creationId xmlns:a16="http://schemas.microsoft.com/office/drawing/2014/main" id="{C138E13A-BB77-4461-A833-7B4F45F4B7FD}"/>
+          <p:cNvPr id="19" name="PPAGENT_QA|parent=org-member-0-0|domains=organization-members">
+            <a:extLst xmlns:a="http://schemas.openxmlformats.org/drawingml/2006/main">
+              <a:ext uri="{FF2B5EF4-FFF2-40B4-BE49-F238E27FC236}">
+                <a16:creationId xmlns:a16="http://schemas.microsoft.com/office/drawing/2014/main" id="{2791E28C-9B36-4238-B349-84DA7050C162}"/>
               </a:ext>
             </a:extLst>
           </p:cNvPr>
@@ -2223,30 +1865,32 @@
         </p:nvSpPr>
         <p:spPr>
           <a:xfrm xmlns:a="http://schemas.openxmlformats.org/drawingml/2006/main">
-            <a:off x="1276350" y="5600700"/>
-            <a:ext cx="1028700" cy="323850"/>
+            <a:off x="666750" y="5438775"/>
+            <a:ext cx="742950" cy="457200"/>
           </a:xfrm>
           <a:prstGeom xmlns:a="http://schemas.openxmlformats.org/drawingml/2006/main" prst="roundRect">
             <a:avLst>
-              <a:gd name="adj" fmla="val 35294"/>
+              <a:gd name="adj" fmla="val 25000"/>
             </a:avLst>
           </a:prstGeom>
           <a:solidFill xmlns:a="http://schemas.openxmlformats.org/drawingml/2006/main">
-            <a:srgbClr val="EEF4FA"/>
-          </a:solidFill>
-          <a:ln xmlns:a="http://schemas.openxmlformats.org/drawingml/2006/main" w="0">
-            <a:noFill/>
+            <a:srgbClr val="F1F5F9"/>
+          </a:solidFill>
+          <a:ln xmlns:a="http://schemas.openxmlformats.org/drawingml/2006/main" w="9525">
+            <a:solidFill>
+              <a:srgbClr val="E1E8EF"/>
+            </a:solidFill>
             <a:prstDash val="solid"/>
           </a:ln>
         </p:spPr>
         <p:txBody>
           <a:bodyPr xmlns:a="http://schemas.openxmlformats.org/drawingml/2006/main" lIns="28575" tIns="19050" rIns="28575" bIns="19050" anchor="ctr">
-            <a:normAutofit fontScale="95711"/>
+            <a:noAutofit/>
           </a:bodyPr>
           <a:lstStyle xmlns:a="http://schemas.openxmlformats.org/drawingml/2006/main"/>
           <a:p xmlns:a="http://schemas.openxmlformats.org/drawingml/2006/main">
             <a:pPr algn="ctr">
-              <a:defRPr sz="750" b="0">
+              <a:defRPr sz="1200" b="0">
                 <a:solidFill>
                   <a:srgbClr val="475569"/>
                 </a:solidFill>
@@ -2256,7 +1900,7 @@
               </a:defRPr>
             </a:pPr>
             <a:r>
-              <a:rPr sz="750" b="0">
+              <a:rPr sz="1200" b="0">
                 <a:solidFill>
                   <a:srgbClr val="475569"/>
                 </a:solidFill>
@@ -2264,40 +1908,17 @@
                 <a:ea typeface="Microsoft YaHei"/>
                 <a:cs typeface="Microsoft YaHei"/>
               </a:rPr>
-              <a:t>江源</a:t>
-            </a:r>
-          </a:p>
-          <a:p xmlns:a="http://schemas.openxmlformats.org/drawingml/2006/main">
-            <a:pPr algn="ctr">
-              <a:defRPr sz="750" b="0">
-                <a:solidFill>
-                  <a:srgbClr val="475569"/>
-                </a:solidFill>
-                <a:latin typeface="Microsoft YaHei"/>
-                <a:ea typeface="Microsoft YaHei"/>
-                <a:cs typeface="Microsoft YaHei"/>
-              </a:defRPr>
-            </a:pPr>
-            <a:r>
-              <a:rPr sz="750" b="0">
-                <a:solidFill>
-                  <a:srgbClr val="475569"/>
-                </a:solidFill>
-                <a:latin typeface="Microsoft YaHei"/>
-                <a:ea typeface="Microsoft YaHei"/>
-                <a:cs typeface="Microsoft YaHei"/>
-              </a:rPr>
-              <a:t>研究</a:t>
+              <a:t>需求</a:t>
             </a:r>
           </a:p>
         </p:txBody>
       </p:sp>
       <p:sp>
         <p:nvSpPr>
-          <p:cNvPr id="29" name="">
-            <a:extLst xmlns:a="http://schemas.openxmlformats.org/drawingml/2006/main">
-              <a:ext uri="{FF2B5EF4-FFF2-40B4-BE49-F238E27FC236}">
-                <a16:creationId xmlns:a16="http://schemas.microsoft.com/office/drawing/2014/main" id="{B38C0062-3FBA-4109-AF17-24C2637040AF}"/>
+          <p:cNvPr id="20" name="">
+            <a:extLst xmlns:a="http://schemas.openxmlformats.org/drawingml/2006/main">
+              <a:ext uri="{FF2B5EF4-FFF2-40B4-BE49-F238E27FC236}">
+                <a16:creationId xmlns:a16="http://schemas.microsoft.com/office/drawing/2014/main" id="{0470958C-4E78-4021-84BC-7678BFDB4DCD}"/>
               </a:ext>
             </a:extLst>
           </p:cNvPr>
@@ -2308,18 +1929,18 @@
         </p:nvSpPr>
         <p:spPr>
           <a:xfrm xmlns:a="http://schemas.openxmlformats.org/drawingml/2006/main">
-            <a:off x="5657850" y="2876550"/>
-            <a:ext cx="876300" cy="876300"/>
+            <a:off x="1533525" y="4810125"/>
+            <a:ext cx="571500" cy="571500"/>
           </a:xfrm>
           <a:prstGeom xmlns:a="http://schemas.openxmlformats.org/drawingml/2006/main" prst="ellipse">
             <a:avLst/>
           </a:prstGeom>
           <a:solidFill xmlns:a="http://schemas.openxmlformats.org/drawingml/2006/main">
-            <a:srgbClr val="EAF2FA"/>
+            <a:srgbClr val="FFFFFF"/>
           </a:solidFill>
           <a:ln xmlns:a="http://schemas.openxmlformats.org/drawingml/2006/main" w="23813">
             <a:solidFill>
-              <a:srgbClr val="1677C8"/>
+              <a:srgbClr val="E3AF45"/>
             </a:solidFill>
             <a:prstDash val="solid"/>
           </a:ln>
@@ -2331,13 +1952,13 @@
           <a:fontRef xmlns:a="http://schemas.openxmlformats.org/drawingml/2006/main" idx="major"/>
         </p:style>
         <p:txBody>
-          <a:bodyPr xmlns:a="http://schemas.openxmlformats.org/drawingml/2006/main" lIns="114300" tIns="76200" rIns="114300" bIns="76200" anchor="ctr">
-            <a:normAutofit fontScale="85769"/>
+          <a:bodyPr xmlns:a="http://schemas.openxmlformats.org/drawingml/2006/main" lIns="0" tIns="0" rIns="0" bIns="0" anchor="ctr">
+            <a:normAutofit fontScale="100000"/>
           </a:bodyPr>
           <a:lstStyle xmlns:a="http://schemas.openxmlformats.org/drawingml/2006/main"/>
           <a:p xmlns:a="http://schemas.openxmlformats.org/drawingml/2006/main">
             <a:pPr algn="ctr">
-              <a:defRPr sz="1800" b="1">
+              <a:defRPr sz="1275" b="1">
                 <a:solidFill>
                   <a:srgbClr val="1677C8"/>
                 </a:solidFill>
@@ -2347,7 +1968,325 @@
               </a:defRPr>
             </a:pPr>
             <a:r>
-              <a:rPr sz="1800" b="1">
+              <a:rPr sz="1275" b="1">
+                <a:solidFill>
+                  <a:srgbClr val="1677C8"/>
+                </a:solidFill>
+                <a:latin typeface="Microsoft YaHei"/>
+                <a:ea typeface="Microsoft YaHei"/>
+                <a:cs typeface="Microsoft YaHei"/>
+              </a:rPr>
+              <a:t>江源</a:t>
+            </a:r>
+          </a:p>
+        </p:txBody>
+      </p:sp>
+      <p:sp>
+        <p:nvSpPr>
+          <p:cNvPr id="21" name="PPAGENT_QA|parent=org-member-0-1|domains=organization-members">
+            <a:extLst xmlns:a="http://schemas.openxmlformats.org/drawingml/2006/main">
+              <a:ext uri="{FF2B5EF4-FFF2-40B4-BE49-F238E27FC236}">
+                <a16:creationId xmlns:a16="http://schemas.microsoft.com/office/drawing/2014/main" id="{76309B2C-BA7D-4BC8-9327-54C391C39571}"/>
+              </a:ext>
+            </a:extLst>
+          </p:cNvPr>
+          <p:cNvSpPr>
+            <a:spLocks xmlns:a="http://schemas.openxmlformats.org/drawingml/2006/main" noGrp="1"/>
+          </p:cNvSpPr>
+          <p:nvPr/>
+        </p:nvSpPr>
+        <p:spPr>
+          <a:xfrm xmlns:a="http://schemas.openxmlformats.org/drawingml/2006/main">
+            <a:off x="1447800" y="5438775"/>
+            <a:ext cx="742950" cy="457200"/>
+          </a:xfrm>
+          <a:prstGeom xmlns:a="http://schemas.openxmlformats.org/drawingml/2006/main" prst="roundRect">
+            <a:avLst>
+              <a:gd name="adj" fmla="val 25000"/>
+            </a:avLst>
+          </a:prstGeom>
+          <a:solidFill xmlns:a="http://schemas.openxmlformats.org/drawingml/2006/main">
+            <a:srgbClr val="F1F5F9"/>
+          </a:solidFill>
+          <a:ln xmlns:a="http://schemas.openxmlformats.org/drawingml/2006/main" w="9525">
+            <a:solidFill>
+              <a:srgbClr val="E1E8EF"/>
+            </a:solidFill>
+            <a:prstDash val="solid"/>
+          </a:ln>
+        </p:spPr>
+        <p:txBody>
+          <a:bodyPr xmlns:a="http://schemas.openxmlformats.org/drawingml/2006/main" lIns="28575" tIns="19050" rIns="28575" bIns="19050" anchor="ctr">
+            <a:noAutofit/>
+          </a:bodyPr>
+          <a:lstStyle xmlns:a="http://schemas.openxmlformats.org/drawingml/2006/main"/>
+          <a:p xmlns:a="http://schemas.openxmlformats.org/drawingml/2006/main">
+            <a:pPr algn="ctr">
+              <a:defRPr sz="1200" b="0">
+                <a:solidFill>
+                  <a:srgbClr val="475569"/>
+                </a:solidFill>
+                <a:latin typeface="Microsoft YaHei"/>
+                <a:ea typeface="Microsoft YaHei"/>
+                <a:cs typeface="Microsoft YaHei"/>
+              </a:defRPr>
+            </a:pPr>
+            <a:r>
+              <a:rPr sz="1200" b="0">
+                <a:solidFill>
+                  <a:srgbClr val="475569"/>
+                </a:solidFill>
+                <a:latin typeface="Microsoft YaHei"/>
+                <a:ea typeface="Microsoft YaHei"/>
+                <a:cs typeface="Microsoft YaHei"/>
+              </a:rPr>
+              <a:t>研究</a:t>
+            </a:r>
+          </a:p>
+        </p:txBody>
+      </p:sp>
+      <p:sp>
+        <p:nvSpPr>
+          <p:cNvPr id="22" name="">
+            <a:extLst xmlns:a="http://schemas.openxmlformats.org/drawingml/2006/main">
+              <a:ext uri="{FF2B5EF4-FFF2-40B4-BE49-F238E27FC236}">
+                <a16:creationId xmlns:a16="http://schemas.microsoft.com/office/drawing/2014/main" id="{348FA7D9-A2D6-48F5-BDD2-73343D460E8D}"/>
+              </a:ext>
+            </a:extLst>
+          </p:cNvPr>
+          <p:cNvSpPr>
+            <a:spLocks xmlns:a="http://schemas.openxmlformats.org/drawingml/2006/main" noGrp="1"/>
+          </p:cNvSpPr>
+          <p:nvPr/>
+        </p:nvSpPr>
+        <p:spPr>
+          <a:xfrm xmlns:a="http://schemas.openxmlformats.org/drawingml/2006/main" flipH="0" flipV="0">
+            <a:off x="6096000" y="3771900"/>
+            <a:ext cx="0" cy="704850"/>
+          </a:xfrm>
+          <a:prstGeom xmlns:a="http://schemas.openxmlformats.org/drawingml/2006/main" prst="line">
+            <a:avLst/>
+          </a:prstGeom>
+          <a:noFill xmlns:a="http://schemas.openxmlformats.org/drawingml/2006/main"/>
+          <a:ln xmlns:a="http://schemas.openxmlformats.org/drawingml/2006/main" w="19050">
+            <a:solidFill>
+              <a:srgbClr val="E3AF45"/>
+            </a:solidFill>
+            <a:prstDash val="solid"/>
+          </a:ln>
+        </p:spPr>
+      </p:sp>
+      <p:sp>
+        <p:nvSpPr>
+          <p:cNvPr id="23" name="">
+            <a:extLst xmlns:a="http://schemas.openxmlformats.org/drawingml/2006/main">
+              <a:ext uri="{FF2B5EF4-FFF2-40B4-BE49-F238E27FC236}">
+                <a16:creationId xmlns:a16="http://schemas.microsoft.com/office/drawing/2014/main" id="{BA968F1B-79AE-48CB-93BD-1AEA9A338537}"/>
+              </a:ext>
+            </a:extLst>
+          </p:cNvPr>
+          <p:cNvSpPr>
+            <a:spLocks xmlns:a="http://schemas.openxmlformats.org/drawingml/2006/main" noGrp="1"/>
+          </p:cNvSpPr>
+          <p:nvPr/>
+        </p:nvSpPr>
+        <p:spPr>
+          <a:xfrm xmlns:a="http://schemas.openxmlformats.org/drawingml/2006/main" flipH="0" flipV="0">
+            <a:off x="5314950" y="4476750"/>
+            <a:ext cx="1562100" cy="0"/>
+          </a:xfrm>
+          <a:prstGeom xmlns:a="http://schemas.openxmlformats.org/drawingml/2006/main" prst="line">
+            <a:avLst/>
+          </a:prstGeom>
+          <a:noFill xmlns:a="http://schemas.openxmlformats.org/drawingml/2006/main"/>
+          <a:ln xmlns:a="http://schemas.openxmlformats.org/drawingml/2006/main" w="19050">
+            <a:solidFill>
+              <a:srgbClr val="E3AF45"/>
+            </a:solidFill>
+            <a:prstDash val="solid"/>
+          </a:ln>
+        </p:spPr>
+      </p:sp>
+      <p:sp>
+        <p:nvSpPr>
+          <p:cNvPr id="24" name="">
+            <a:extLst xmlns:a="http://schemas.openxmlformats.org/drawingml/2006/main">
+              <a:ext uri="{FF2B5EF4-FFF2-40B4-BE49-F238E27FC236}">
+                <a16:creationId xmlns:a16="http://schemas.microsoft.com/office/drawing/2014/main" id="{029A8EC0-09B9-4766-A28D-7816850A19C3}"/>
+              </a:ext>
+            </a:extLst>
+          </p:cNvPr>
+          <p:cNvSpPr>
+            <a:spLocks xmlns:a="http://schemas.openxmlformats.org/drawingml/2006/main" noGrp="1"/>
+          </p:cNvSpPr>
+          <p:nvPr/>
+        </p:nvSpPr>
+        <p:spPr>
+          <a:xfrm xmlns:a="http://schemas.openxmlformats.org/drawingml/2006/main" flipH="0" flipV="0">
+            <a:off x="5314950" y="4476750"/>
+            <a:ext cx="0" cy="333375"/>
+          </a:xfrm>
+          <a:prstGeom xmlns:a="http://schemas.openxmlformats.org/drawingml/2006/main" prst="line">
+            <a:avLst/>
+          </a:prstGeom>
+          <a:noFill xmlns:a="http://schemas.openxmlformats.org/drawingml/2006/main"/>
+          <a:ln xmlns:a="http://schemas.openxmlformats.org/drawingml/2006/main" w="19050">
+            <a:solidFill>
+              <a:srgbClr val="E3AF45"/>
+            </a:solidFill>
+            <a:prstDash val="solid"/>
+          </a:ln>
+        </p:spPr>
+      </p:sp>
+      <p:sp>
+        <p:nvSpPr>
+          <p:cNvPr id="25" name="">
+            <a:extLst xmlns:a="http://schemas.openxmlformats.org/drawingml/2006/main">
+              <a:ext uri="{FF2B5EF4-FFF2-40B4-BE49-F238E27FC236}">
+                <a16:creationId xmlns:a16="http://schemas.microsoft.com/office/drawing/2014/main" id="{50EFA296-E6AB-403B-A341-711F1D5E86A3}"/>
+              </a:ext>
+            </a:extLst>
+          </p:cNvPr>
+          <p:cNvSpPr>
+            <a:spLocks xmlns:a="http://schemas.openxmlformats.org/drawingml/2006/main" noGrp="1"/>
+          </p:cNvSpPr>
+          <p:nvPr/>
+        </p:nvSpPr>
+        <p:spPr>
+          <a:xfrm xmlns:a="http://schemas.openxmlformats.org/drawingml/2006/main" flipH="0" flipV="0">
+            <a:off x="6096000" y="4476750"/>
+            <a:ext cx="0" cy="333375"/>
+          </a:xfrm>
+          <a:prstGeom xmlns:a="http://schemas.openxmlformats.org/drawingml/2006/main" prst="line">
+            <a:avLst/>
+          </a:prstGeom>
+          <a:noFill xmlns:a="http://schemas.openxmlformats.org/drawingml/2006/main"/>
+          <a:ln xmlns:a="http://schemas.openxmlformats.org/drawingml/2006/main" w="19050">
+            <a:solidFill>
+              <a:srgbClr val="E3AF45"/>
+            </a:solidFill>
+            <a:prstDash val="solid"/>
+          </a:ln>
+        </p:spPr>
+      </p:sp>
+      <p:sp>
+        <p:nvSpPr>
+          <p:cNvPr id="26" name="">
+            <a:extLst xmlns:a="http://schemas.openxmlformats.org/drawingml/2006/main">
+              <a:ext uri="{FF2B5EF4-FFF2-40B4-BE49-F238E27FC236}">
+                <a16:creationId xmlns:a16="http://schemas.microsoft.com/office/drawing/2014/main" id="{4339B845-AA14-469E-AF4F-9BD13E9B23B5}"/>
+              </a:ext>
+            </a:extLst>
+          </p:cNvPr>
+          <p:cNvSpPr>
+            <a:spLocks xmlns:a="http://schemas.openxmlformats.org/drawingml/2006/main" noGrp="1"/>
+          </p:cNvSpPr>
+          <p:nvPr/>
+        </p:nvSpPr>
+        <p:spPr>
+          <a:xfrm xmlns:a="http://schemas.openxmlformats.org/drawingml/2006/main" flipH="0" flipV="0">
+            <a:off x="6877050" y="4476750"/>
+            <a:ext cx="0" cy="333375"/>
+          </a:xfrm>
+          <a:prstGeom xmlns:a="http://schemas.openxmlformats.org/drawingml/2006/main" prst="line">
+            <a:avLst/>
+          </a:prstGeom>
+          <a:noFill xmlns:a="http://schemas.openxmlformats.org/drawingml/2006/main"/>
+          <a:ln xmlns:a="http://schemas.openxmlformats.org/drawingml/2006/main" w="19050">
+            <a:solidFill>
+              <a:srgbClr val="E3AF45"/>
+            </a:solidFill>
+            <a:prstDash val="solid"/>
+          </a:ln>
+        </p:spPr>
+      </p:sp>
+      <p:sp>
+        <p:nvSpPr>
+          <p:cNvPr id="27" name="">
+            <a:extLst xmlns:a="http://schemas.openxmlformats.org/drawingml/2006/main">
+              <a:ext uri="{FF2B5EF4-FFF2-40B4-BE49-F238E27FC236}">
+                <a16:creationId xmlns:a16="http://schemas.microsoft.com/office/drawing/2014/main" id="{98D8A4DD-4BD5-4FF3-8A15-98264206B015}"/>
+              </a:ext>
+            </a:extLst>
+          </p:cNvPr>
+          <p:cNvSpPr>
+            <a:spLocks xmlns:a="http://schemas.openxmlformats.org/drawingml/2006/main" noGrp="1"/>
+          </p:cNvSpPr>
+          <p:nvPr/>
+        </p:nvSpPr>
+        <p:spPr>
+          <a:xfrm xmlns:a="http://schemas.openxmlformats.org/drawingml/2006/main">
+            <a:off x="5619750" y="2857500"/>
+            <a:ext cx="952500" cy="952500"/>
+          </a:xfrm>
+          <a:prstGeom xmlns:a="http://schemas.openxmlformats.org/drawingml/2006/main" prst="ellipse">
+            <a:avLst/>
+          </a:prstGeom>
+          <a:solidFill xmlns:a="http://schemas.openxmlformats.org/drawingml/2006/main">
+            <a:srgbClr val="E4EDF6"/>
+          </a:solidFill>
+          <a:ln xmlns:a="http://schemas.openxmlformats.org/drawingml/2006/main" w="0">
+            <a:noFill/>
+            <a:prstDash val="solid"/>
+          </a:ln>
+        </p:spPr>
+      </p:sp>
+      <p:sp>
+        <p:nvSpPr>
+          <p:cNvPr id="28" name="">
+            <a:extLst xmlns:a="http://schemas.openxmlformats.org/drawingml/2006/main">
+              <a:ext uri="{FF2B5EF4-FFF2-40B4-BE49-F238E27FC236}">
+                <a16:creationId xmlns:a16="http://schemas.microsoft.com/office/drawing/2014/main" id="{79CB06BE-9074-4AA3-B835-535CB7ED0FE2}"/>
+              </a:ext>
+            </a:extLst>
+          </p:cNvPr>
+          <p:cNvSpPr>
+            <a:spLocks xmlns:a="http://schemas.openxmlformats.org/drawingml/2006/main" noGrp="1"/>
+          </p:cNvSpPr>
+          <p:nvPr/>
+        </p:nvSpPr>
+        <p:spPr>
+          <a:xfrm xmlns:a="http://schemas.openxmlformats.org/drawingml/2006/main">
+            <a:off x="5715000" y="2952750"/>
+            <a:ext cx="762000" cy="762000"/>
+          </a:xfrm>
+          <a:prstGeom xmlns:a="http://schemas.openxmlformats.org/drawingml/2006/main" prst="ellipse">
+            <a:avLst/>
+          </a:prstGeom>
+          <a:solidFill xmlns:a="http://schemas.openxmlformats.org/drawingml/2006/main">
+            <a:srgbClr val="FFFFFF"/>
+          </a:solidFill>
+          <a:ln xmlns:a="http://schemas.openxmlformats.org/drawingml/2006/main" w="23813">
+            <a:solidFill>
+              <a:srgbClr val="1677C8"/>
+            </a:solidFill>
+            <a:prstDash val="solid"/>
+          </a:ln>
+        </p:spPr>
+        <p:style>
+          <a:lnRef xmlns:a="http://schemas.openxmlformats.org/drawingml/2006/main" idx="0"/>
+          <a:fillRef xmlns:a="http://schemas.openxmlformats.org/drawingml/2006/main" idx="0"/>
+          <a:effectRef xmlns:a="http://schemas.openxmlformats.org/drawingml/2006/main" idx="6"/>
+          <a:fontRef xmlns:a="http://schemas.openxmlformats.org/drawingml/2006/main" idx="major"/>
+        </p:style>
+        <p:txBody>
+          <a:bodyPr xmlns:a="http://schemas.openxmlformats.org/drawingml/2006/main" lIns="0" tIns="0" rIns="0" bIns="0" anchor="ctr">
+            <a:normAutofit fontScale="100000"/>
+          </a:bodyPr>
+          <a:lstStyle xmlns:a="http://schemas.openxmlformats.org/drawingml/2006/main"/>
+          <a:p xmlns:a="http://schemas.openxmlformats.org/drawingml/2006/main">
+            <a:pPr algn="ctr">
+              <a:defRPr sz="1575" b="1">
+                <a:solidFill>
+                  <a:srgbClr val="1677C8"/>
+                </a:solidFill>
+                <a:latin typeface="Microsoft YaHei"/>
+                <a:ea typeface="Microsoft YaHei"/>
+                <a:cs typeface="Microsoft YaHei"/>
+              </a:defRPr>
+            </a:pPr>
+            <a:r>
+              <a:rPr sz="1575" b="1">
                 <a:solidFill>
                   <a:srgbClr val="1677C8"/>
                 </a:solidFill>
@@ -2362,10 +2301,10 @@
       </p:sp>
       <p:sp>
         <p:nvSpPr>
-          <p:cNvPr id="30" name="">
-            <a:extLst xmlns:a="http://schemas.openxmlformats.org/drawingml/2006/main">
-              <a:ext uri="{FF2B5EF4-FFF2-40B4-BE49-F238E27FC236}">
-                <a16:creationId xmlns:a16="http://schemas.microsoft.com/office/drawing/2014/main" id="{0B053AAA-7224-40A1-A652-A94AB71F4704}"/>
+          <p:cNvPr id="29" name="PPAGENT_QA|parent=org-department-1|domains=organization-departments">
+            <a:extLst xmlns:a="http://schemas.openxmlformats.org/drawingml/2006/main">
+              <a:ext uri="{FF2B5EF4-FFF2-40B4-BE49-F238E27FC236}">
+                <a16:creationId xmlns:a16="http://schemas.microsoft.com/office/drawing/2014/main" id="{A78FFDCB-DBE4-42BD-8B79-3F007284F19A}"/>
               </a:ext>
             </a:extLst>
           </p:cNvPr>
@@ -2376,12 +2315,12 @@
         </p:nvSpPr>
         <p:spPr>
           <a:xfrm xmlns:a="http://schemas.openxmlformats.org/drawingml/2006/main">
-            <a:off x="5143500" y="3810000"/>
-            <a:ext cx="1905000" cy="342900"/>
+            <a:off x="5067300" y="3810000"/>
+            <a:ext cx="2057400" cy="361950"/>
           </a:xfrm>
           <a:prstGeom xmlns:a="http://schemas.openxmlformats.org/drawingml/2006/main" prst="roundRect">
             <a:avLst>
-              <a:gd name="adj" fmla="val 33333"/>
+              <a:gd name="adj" fmla="val 31579"/>
             </a:avLst>
           </a:prstGeom>
           <a:solidFill xmlns:a="http://schemas.openxmlformats.org/drawingml/2006/main">
@@ -2389,68 +2328,6 @@
           </a:solidFill>
           <a:ln xmlns:a="http://schemas.openxmlformats.org/drawingml/2006/main" w="0">
             <a:noFill/>
-            <a:prstDash val="solid"/>
-          </a:ln>
-        </p:spPr>
-        <p:txBody>
-          <a:bodyPr xmlns:a="http://schemas.openxmlformats.org/drawingml/2006/main" lIns="47625" tIns="19050" rIns="47625" bIns="19050" anchor="ctr">
-            <a:normAutofit fontScale="100000"/>
-          </a:bodyPr>
-          <a:lstStyle xmlns:a="http://schemas.openxmlformats.org/drawingml/2006/main"/>
-          <a:p xmlns:a="http://schemas.openxmlformats.org/drawingml/2006/main">
-            <a:pPr algn="ctr">
-              <a:defRPr sz="1050" b="1">
-                <a:solidFill>
-                  <a:srgbClr val="FFFFFF"/>
-                </a:solidFill>
-                <a:latin typeface="Microsoft YaHei"/>
-                <a:ea typeface="Microsoft YaHei"/>
-                <a:cs typeface="Microsoft YaHei"/>
-              </a:defRPr>
-            </a:pPr>
-            <a:r>
-              <a:rPr sz="1050" b="1">
-                <a:solidFill>
-                  <a:srgbClr val="FFFFFF"/>
-                </a:solidFill>
-                <a:latin typeface="Microsoft YaHei"/>
-                <a:ea typeface="Microsoft YaHei"/>
-                <a:cs typeface="Microsoft YaHei"/>
-              </a:rPr>
-              <a:t>徐阳｜技术组</a:t>
-            </a:r>
-          </a:p>
-        </p:txBody>
-      </p:sp>
-      <p:sp>
-        <p:nvSpPr>
-          <p:cNvPr id="31" name="">
-            <a:extLst xmlns:a="http://schemas.openxmlformats.org/drawingml/2006/main">
-              <a:ext uri="{FF2B5EF4-FFF2-40B4-BE49-F238E27FC236}">
-                <a16:creationId xmlns:a16="http://schemas.microsoft.com/office/drawing/2014/main" id="{F9A6C21E-BC6F-430E-8A38-85D7E3318E19}"/>
-              </a:ext>
-            </a:extLst>
-          </p:cNvPr>
-          <p:cNvSpPr>
-            <a:spLocks xmlns:a="http://schemas.openxmlformats.org/drawingml/2006/main" noGrp="1"/>
-          </p:cNvSpPr>
-          <p:nvPr/>
-        </p:nvSpPr>
-        <p:spPr>
-          <a:xfrm xmlns:a="http://schemas.openxmlformats.org/drawingml/2006/main">
-            <a:off x="5057775" y="4905375"/>
-            <a:ext cx="628650" cy="628650"/>
-          </a:xfrm>
-          <a:prstGeom xmlns:a="http://schemas.openxmlformats.org/drawingml/2006/main" prst="ellipse">
-            <a:avLst/>
-          </a:prstGeom>
-          <a:solidFill xmlns:a="http://schemas.openxmlformats.org/drawingml/2006/main">
-            <a:srgbClr val="FFFFFF"/>
-          </a:solidFill>
-          <a:ln xmlns:a="http://schemas.openxmlformats.org/drawingml/2006/main" w="19050">
-            <a:solidFill>
-              <a:srgbClr val="00A8D8"/>
-            </a:solidFill>
             <a:prstDash val="solid"/>
           </a:ln>
         </p:spPr>
@@ -2461,15 +2338,15 @@
           <a:fontRef xmlns:a="http://schemas.openxmlformats.org/drawingml/2006/main" idx="major"/>
         </p:style>
         <p:txBody>
-          <a:bodyPr xmlns:a="http://schemas.openxmlformats.org/drawingml/2006/main" lIns="114300" tIns="76200" rIns="114300" bIns="76200" anchor="ctr">
-            <a:normAutofit fontScale="70993"/>
+          <a:bodyPr xmlns:a="http://schemas.openxmlformats.org/drawingml/2006/main" lIns="57150" tIns="19050" rIns="57150" bIns="19050" anchor="ctr">
+            <a:normAutofit fontScale="100000"/>
           </a:bodyPr>
           <a:lstStyle xmlns:a="http://schemas.openxmlformats.org/drawingml/2006/main"/>
           <a:p xmlns:a="http://schemas.openxmlformats.org/drawingml/2006/main">
             <a:pPr algn="ctr">
-              <a:defRPr sz="1350" b="1">
-                <a:solidFill>
-                  <a:srgbClr val="00A8D8"/>
+              <a:defRPr sz="1200" b="1">
+                <a:solidFill>
+                  <a:srgbClr val="FFFFFF"/>
                 </a:solidFill>
                 <a:latin typeface="Microsoft YaHei"/>
                 <a:ea typeface="Microsoft YaHei"/>
@@ -2477,25 +2354,25 @@
               </a:defRPr>
             </a:pPr>
             <a:r>
-              <a:rPr sz="1350" b="1">
-                <a:solidFill>
-                  <a:srgbClr val="00A8D8"/>
+              <a:rPr sz="1200" b="1">
+                <a:solidFill>
+                  <a:srgbClr val="FFFFFF"/>
                 </a:solidFill>
                 <a:latin typeface="Microsoft YaHei"/>
                 <a:ea typeface="Microsoft YaHei"/>
                 <a:cs typeface="Microsoft YaHei"/>
               </a:rPr>
-              <a:t>周楠</a:t>
+              <a:t>徐阳｜技术组</a:t>
             </a:r>
           </a:p>
         </p:txBody>
       </p:sp>
       <p:sp>
         <p:nvSpPr>
-          <p:cNvPr id="32" name="">
-            <a:extLst xmlns:a="http://schemas.openxmlformats.org/drawingml/2006/main">
-              <a:ext uri="{FF2B5EF4-FFF2-40B4-BE49-F238E27FC236}">
-                <a16:creationId xmlns:a16="http://schemas.microsoft.com/office/drawing/2014/main" id="{11425BBC-F3B9-4CFF-9811-FFEB99F8480B}"/>
+          <p:cNvPr id="30" name="">
+            <a:extLst xmlns:a="http://schemas.openxmlformats.org/drawingml/2006/main">
+              <a:ext uri="{FF2B5EF4-FFF2-40B4-BE49-F238E27FC236}">
+                <a16:creationId xmlns:a16="http://schemas.microsoft.com/office/drawing/2014/main" id="{E7A3CCF1-87A8-44C1-AA2D-F2E0B48D6473}"/>
               </a:ext>
             </a:extLst>
           </p:cNvPr>
@@ -2506,93 +2383,8 @@
         </p:nvSpPr>
         <p:spPr>
           <a:xfrm xmlns:a="http://schemas.openxmlformats.org/drawingml/2006/main">
-            <a:off x="5038725" y="5600700"/>
-            <a:ext cx="666750" cy="323850"/>
-          </a:xfrm>
-          <a:prstGeom xmlns:a="http://schemas.openxmlformats.org/drawingml/2006/main" prst="roundRect">
-            <a:avLst>
-              <a:gd name="adj" fmla="val 35294"/>
-            </a:avLst>
-          </a:prstGeom>
-          <a:solidFill xmlns:a="http://schemas.openxmlformats.org/drawingml/2006/main">
-            <a:srgbClr val="EEF4FA"/>
-          </a:solidFill>
-          <a:ln xmlns:a="http://schemas.openxmlformats.org/drawingml/2006/main" w="0">
-            <a:noFill/>
-            <a:prstDash val="solid"/>
-          </a:ln>
-        </p:spPr>
-        <p:txBody>
-          <a:bodyPr xmlns:a="http://schemas.openxmlformats.org/drawingml/2006/main" lIns="28575" tIns="19050" rIns="28575" bIns="19050" anchor="ctr">
-            <a:normAutofit fontScale="95711"/>
-          </a:bodyPr>
-          <a:lstStyle xmlns:a="http://schemas.openxmlformats.org/drawingml/2006/main"/>
-          <a:p xmlns:a="http://schemas.openxmlformats.org/drawingml/2006/main">
-            <a:pPr algn="ctr">
-              <a:defRPr sz="750" b="0">
-                <a:solidFill>
-                  <a:srgbClr val="475569"/>
-                </a:solidFill>
-                <a:latin typeface="Microsoft YaHei"/>
-                <a:ea typeface="Microsoft YaHei"/>
-                <a:cs typeface="Microsoft YaHei"/>
-              </a:defRPr>
-            </a:pPr>
-            <a:r>
-              <a:rPr sz="750" b="0">
-                <a:solidFill>
-                  <a:srgbClr val="475569"/>
-                </a:solidFill>
-                <a:latin typeface="Microsoft YaHei"/>
-                <a:ea typeface="Microsoft YaHei"/>
-                <a:cs typeface="Microsoft YaHei"/>
-              </a:rPr>
-              <a:t>周楠</a:t>
-            </a:r>
-          </a:p>
-          <a:p xmlns:a="http://schemas.openxmlformats.org/drawingml/2006/main">
-            <a:pPr algn="ctr">
-              <a:defRPr sz="750" b="0">
-                <a:solidFill>
-                  <a:srgbClr val="475569"/>
-                </a:solidFill>
-                <a:latin typeface="Microsoft YaHei"/>
-                <a:ea typeface="Microsoft YaHei"/>
-                <a:cs typeface="Microsoft YaHei"/>
-              </a:defRPr>
-            </a:pPr>
-            <a:r>
-              <a:rPr sz="750" b="0">
-                <a:solidFill>
-                  <a:srgbClr val="475569"/>
-                </a:solidFill>
-                <a:latin typeface="Microsoft YaHei"/>
-                <a:ea typeface="Microsoft YaHei"/>
-                <a:cs typeface="Microsoft YaHei"/>
-              </a:rPr>
-              <a:t>前端</a:t>
-            </a:r>
-          </a:p>
-        </p:txBody>
-      </p:sp>
-      <p:sp>
-        <p:nvSpPr>
-          <p:cNvPr id="33" name="">
-            <a:extLst xmlns:a="http://schemas.openxmlformats.org/drawingml/2006/main">
-              <a:ext uri="{FF2B5EF4-FFF2-40B4-BE49-F238E27FC236}">
-                <a16:creationId xmlns:a16="http://schemas.microsoft.com/office/drawing/2014/main" id="{DAE3B16B-2C1B-4B28-A2AB-99EA35BB0BCF}"/>
-              </a:ext>
-            </a:extLst>
-          </p:cNvPr>
-          <p:cNvSpPr>
-            <a:spLocks xmlns:a="http://schemas.openxmlformats.org/drawingml/2006/main" noGrp="1"/>
-          </p:cNvSpPr>
-          <p:nvPr/>
-        </p:nvSpPr>
-        <p:spPr>
-          <a:xfrm xmlns:a="http://schemas.openxmlformats.org/drawingml/2006/main">
-            <a:off x="5781675" y="4905375"/>
-            <a:ext cx="628650" cy="628650"/>
+            <a:off x="5029200" y="4810125"/>
+            <a:ext cx="571500" cy="571500"/>
           </a:xfrm>
           <a:prstGeom xmlns:a="http://schemas.openxmlformats.org/drawingml/2006/main" prst="ellipse">
             <a:avLst/>
@@ -2600,9 +2392,9 @@
           <a:solidFill xmlns:a="http://schemas.openxmlformats.org/drawingml/2006/main">
             <a:srgbClr val="FFFFFF"/>
           </a:solidFill>
-          <a:ln xmlns:a="http://schemas.openxmlformats.org/drawingml/2006/main" w="19050">
+          <a:ln xmlns:a="http://schemas.openxmlformats.org/drawingml/2006/main" w="23813">
             <a:solidFill>
-              <a:srgbClr val="00A8D8"/>
+              <a:srgbClr val="E3AF45"/>
             </a:solidFill>
             <a:prstDash val="solid"/>
           </a:ln>
@@ -2614,15 +2406,15 @@
           <a:fontRef xmlns:a="http://schemas.openxmlformats.org/drawingml/2006/main" idx="major"/>
         </p:style>
         <p:txBody>
-          <a:bodyPr xmlns:a="http://schemas.openxmlformats.org/drawingml/2006/main" lIns="114300" tIns="76200" rIns="114300" bIns="76200" anchor="ctr">
-            <a:normAutofit fontScale="70993"/>
+          <a:bodyPr xmlns:a="http://schemas.openxmlformats.org/drawingml/2006/main" lIns="0" tIns="0" rIns="0" bIns="0" anchor="ctr">
+            <a:normAutofit fontScale="100000"/>
           </a:bodyPr>
           <a:lstStyle xmlns:a="http://schemas.openxmlformats.org/drawingml/2006/main"/>
           <a:p xmlns:a="http://schemas.openxmlformats.org/drawingml/2006/main">
             <a:pPr algn="ctr">
-              <a:defRPr sz="1350" b="1">
-                <a:solidFill>
-                  <a:srgbClr val="00A8D8"/>
+              <a:defRPr sz="1275" b="1">
+                <a:solidFill>
+                  <a:srgbClr val="1677C8"/>
                 </a:solidFill>
                 <a:latin typeface="Microsoft YaHei"/>
                 <a:ea typeface="Microsoft YaHei"/>
@@ -2630,25 +2422,25 @@
               </a:defRPr>
             </a:pPr>
             <a:r>
-              <a:rPr sz="1350" b="1">
-                <a:solidFill>
-                  <a:srgbClr val="00A8D8"/>
+              <a:rPr sz="1275" b="1">
+                <a:solidFill>
+                  <a:srgbClr val="1677C8"/>
                 </a:solidFill>
                 <a:latin typeface="Microsoft YaHei"/>
                 <a:ea typeface="Microsoft YaHei"/>
                 <a:cs typeface="Microsoft YaHei"/>
               </a:rPr>
-              <a:t>叶琳</a:t>
+              <a:t>周楠</a:t>
             </a:r>
           </a:p>
         </p:txBody>
       </p:sp>
       <p:sp>
         <p:nvSpPr>
-          <p:cNvPr id="34" name="">
-            <a:extLst xmlns:a="http://schemas.openxmlformats.org/drawingml/2006/main">
-              <a:ext uri="{FF2B5EF4-FFF2-40B4-BE49-F238E27FC236}">
-                <a16:creationId xmlns:a16="http://schemas.microsoft.com/office/drawing/2014/main" id="{E6F09A2A-4260-47AD-8C7E-E0634A408A16}"/>
+          <p:cNvPr id="31" name="PPAGENT_QA|parent=org-member-1-0|domains=organization-members">
+            <a:extLst xmlns:a="http://schemas.openxmlformats.org/drawingml/2006/main">
+              <a:ext uri="{FF2B5EF4-FFF2-40B4-BE49-F238E27FC236}">
+                <a16:creationId xmlns:a16="http://schemas.microsoft.com/office/drawing/2014/main" id="{FF95EAE2-65DA-4A7F-9707-9C018556F671}"/>
               </a:ext>
             </a:extLst>
           </p:cNvPr>
@@ -2659,30 +2451,32 @@
         </p:nvSpPr>
         <p:spPr>
           <a:xfrm xmlns:a="http://schemas.openxmlformats.org/drawingml/2006/main">
-            <a:off x="5762625" y="5600700"/>
-            <a:ext cx="666750" cy="323850"/>
+            <a:off x="4943475" y="5438775"/>
+            <a:ext cx="742950" cy="457200"/>
           </a:xfrm>
           <a:prstGeom xmlns:a="http://schemas.openxmlformats.org/drawingml/2006/main" prst="roundRect">
             <a:avLst>
-              <a:gd name="adj" fmla="val 35294"/>
+              <a:gd name="adj" fmla="val 25000"/>
             </a:avLst>
           </a:prstGeom>
           <a:solidFill xmlns:a="http://schemas.openxmlformats.org/drawingml/2006/main">
-            <a:srgbClr val="EEF4FA"/>
-          </a:solidFill>
-          <a:ln xmlns:a="http://schemas.openxmlformats.org/drawingml/2006/main" w="0">
-            <a:noFill/>
+            <a:srgbClr val="F1F5F9"/>
+          </a:solidFill>
+          <a:ln xmlns:a="http://schemas.openxmlformats.org/drawingml/2006/main" w="9525">
+            <a:solidFill>
+              <a:srgbClr val="E1E8EF"/>
+            </a:solidFill>
             <a:prstDash val="solid"/>
           </a:ln>
         </p:spPr>
         <p:txBody>
           <a:bodyPr xmlns:a="http://schemas.openxmlformats.org/drawingml/2006/main" lIns="28575" tIns="19050" rIns="28575" bIns="19050" anchor="ctr">
-            <a:normAutofit fontScale="95711"/>
+            <a:noAutofit/>
           </a:bodyPr>
           <a:lstStyle xmlns:a="http://schemas.openxmlformats.org/drawingml/2006/main"/>
           <a:p xmlns:a="http://schemas.openxmlformats.org/drawingml/2006/main">
             <a:pPr algn="ctr">
-              <a:defRPr sz="750" b="0">
+              <a:defRPr sz="1200" b="0">
                 <a:solidFill>
                   <a:srgbClr val="475569"/>
                 </a:solidFill>
@@ -2692,7 +2486,7 @@
               </a:defRPr>
             </a:pPr>
             <a:r>
-              <a:rPr sz="750" b="0">
+              <a:rPr sz="1200" b="0">
                 <a:solidFill>
                   <a:srgbClr val="475569"/>
                 </a:solidFill>
@@ -2700,40 +2494,17 @@
                 <a:ea typeface="Microsoft YaHei"/>
                 <a:cs typeface="Microsoft YaHei"/>
               </a:rPr>
-              <a:t>叶琳</a:t>
-            </a:r>
-          </a:p>
-          <a:p xmlns:a="http://schemas.openxmlformats.org/drawingml/2006/main">
-            <a:pPr algn="ctr">
-              <a:defRPr sz="750" b="0">
-                <a:solidFill>
-                  <a:srgbClr val="475569"/>
-                </a:solidFill>
-                <a:latin typeface="Microsoft YaHei"/>
-                <a:ea typeface="Microsoft YaHei"/>
-                <a:cs typeface="Microsoft YaHei"/>
-              </a:defRPr>
-            </a:pPr>
-            <a:r>
-              <a:rPr sz="750" b="0">
-                <a:solidFill>
-                  <a:srgbClr val="475569"/>
-                </a:solidFill>
-                <a:latin typeface="Microsoft YaHei"/>
-                <a:ea typeface="Microsoft YaHei"/>
-                <a:cs typeface="Microsoft YaHei"/>
-              </a:rPr>
-              <a:t>后端</a:t>
+              <a:t>前端</a:t>
             </a:r>
           </a:p>
         </p:txBody>
       </p:sp>
       <p:sp>
         <p:nvSpPr>
-          <p:cNvPr id="35" name="">
-            <a:extLst xmlns:a="http://schemas.openxmlformats.org/drawingml/2006/main">
-              <a:ext uri="{FF2B5EF4-FFF2-40B4-BE49-F238E27FC236}">
-                <a16:creationId xmlns:a16="http://schemas.microsoft.com/office/drawing/2014/main" id="{5B813F52-809C-49D8-AA78-F39DB785A80F}"/>
+          <p:cNvPr id="32" name="">
+            <a:extLst xmlns:a="http://schemas.openxmlformats.org/drawingml/2006/main">
+              <a:ext uri="{FF2B5EF4-FFF2-40B4-BE49-F238E27FC236}">
+                <a16:creationId xmlns:a16="http://schemas.microsoft.com/office/drawing/2014/main" id="{4C1ECA26-5270-4E29-BC8A-3832321EB19C}"/>
               </a:ext>
             </a:extLst>
           </p:cNvPr>
@@ -2744,8 +2515,8 @@
         </p:nvSpPr>
         <p:spPr>
           <a:xfrm xmlns:a="http://schemas.openxmlformats.org/drawingml/2006/main">
-            <a:off x="6505575" y="4905375"/>
-            <a:ext cx="628650" cy="628650"/>
+            <a:off x="5810250" y="4810125"/>
+            <a:ext cx="571500" cy="571500"/>
           </a:xfrm>
           <a:prstGeom xmlns:a="http://schemas.openxmlformats.org/drawingml/2006/main" prst="ellipse">
             <a:avLst/>
@@ -2753,9 +2524,9 @@
           <a:solidFill xmlns:a="http://schemas.openxmlformats.org/drawingml/2006/main">
             <a:srgbClr val="FFFFFF"/>
           </a:solidFill>
-          <a:ln xmlns:a="http://schemas.openxmlformats.org/drawingml/2006/main" w="19050">
+          <a:ln xmlns:a="http://schemas.openxmlformats.org/drawingml/2006/main" w="23813">
             <a:solidFill>
-              <a:srgbClr val="00A8D8"/>
+              <a:srgbClr val="E3AF45"/>
             </a:solidFill>
             <a:prstDash val="solid"/>
           </a:ln>
@@ -2767,15 +2538,15 @@
           <a:fontRef xmlns:a="http://schemas.openxmlformats.org/drawingml/2006/main" idx="major"/>
         </p:style>
         <p:txBody>
-          <a:bodyPr xmlns:a="http://schemas.openxmlformats.org/drawingml/2006/main" lIns="114300" tIns="76200" rIns="114300" bIns="76200" anchor="ctr">
-            <a:normAutofit fontScale="70993"/>
+          <a:bodyPr xmlns:a="http://schemas.openxmlformats.org/drawingml/2006/main" lIns="0" tIns="0" rIns="0" bIns="0" anchor="ctr">
+            <a:normAutofit fontScale="100000"/>
           </a:bodyPr>
           <a:lstStyle xmlns:a="http://schemas.openxmlformats.org/drawingml/2006/main"/>
           <a:p xmlns:a="http://schemas.openxmlformats.org/drawingml/2006/main">
             <a:pPr algn="ctr">
-              <a:defRPr sz="1350" b="1">
-                <a:solidFill>
-                  <a:srgbClr val="00A8D8"/>
+              <a:defRPr sz="1275" b="1">
+                <a:solidFill>
+                  <a:srgbClr val="1677C8"/>
                 </a:solidFill>
                 <a:latin typeface="Microsoft YaHei"/>
                 <a:ea typeface="Microsoft YaHei"/>
@@ -2783,25 +2554,25 @@
               </a:defRPr>
             </a:pPr>
             <a:r>
-              <a:rPr sz="1350" b="1">
-                <a:solidFill>
-                  <a:srgbClr val="00A8D8"/>
+              <a:rPr sz="1275" b="1">
+                <a:solidFill>
+                  <a:srgbClr val="1677C8"/>
                 </a:solidFill>
                 <a:latin typeface="Microsoft YaHei"/>
                 <a:ea typeface="Microsoft YaHei"/>
                 <a:cs typeface="Microsoft YaHei"/>
               </a:rPr>
-              <a:t>陈浩</a:t>
+              <a:t>叶琳</a:t>
             </a:r>
           </a:p>
         </p:txBody>
       </p:sp>
       <p:sp>
         <p:nvSpPr>
-          <p:cNvPr id="36" name="">
-            <a:extLst xmlns:a="http://schemas.openxmlformats.org/drawingml/2006/main">
-              <a:ext uri="{FF2B5EF4-FFF2-40B4-BE49-F238E27FC236}">
-                <a16:creationId xmlns:a16="http://schemas.microsoft.com/office/drawing/2014/main" id="{4CDED974-F018-486C-ACC5-0A8DBB9A4EAB}"/>
+          <p:cNvPr id="33" name="PPAGENT_QA|parent=org-member-1-1|domains=organization-members">
+            <a:extLst xmlns:a="http://schemas.openxmlformats.org/drawingml/2006/main">
+              <a:ext uri="{FF2B5EF4-FFF2-40B4-BE49-F238E27FC236}">
+                <a16:creationId xmlns:a16="http://schemas.microsoft.com/office/drawing/2014/main" id="{C378E7A0-5124-4984-9E91-D8B6FDA5FD1E}"/>
               </a:ext>
             </a:extLst>
           </p:cNvPr>
@@ -2812,30 +2583,32 @@
         </p:nvSpPr>
         <p:spPr>
           <a:xfrm xmlns:a="http://schemas.openxmlformats.org/drawingml/2006/main">
-            <a:off x="6486525" y="5600700"/>
-            <a:ext cx="666750" cy="323850"/>
+            <a:off x="5724525" y="5438775"/>
+            <a:ext cx="742950" cy="457200"/>
           </a:xfrm>
           <a:prstGeom xmlns:a="http://schemas.openxmlformats.org/drawingml/2006/main" prst="roundRect">
             <a:avLst>
-              <a:gd name="adj" fmla="val 35294"/>
+              <a:gd name="adj" fmla="val 25000"/>
             </a:avLst>
           </a:prstGeom>
           <a:solidFill xmlns:a="http://schemas.openxmlformats.org/drawingml/2006/main">
-            <a:srgbClr val="EEF4FA"/>
-          </a:solidFill>
-          <a:ln xmlns:a="http://schemas.openxmlformats.org/drawingml/2006/main" w="0">
-            <a:noFill/>
+            <a:srgbClr val="F1F5F9"/>
+          </a:solidFill>
+          <a:ln xmlns:a="http://schemas.openxmlformats.org/drawingml/2006/main" w="9525">
+            <a:solidFill>
+              <a:srgbClr val="E1E8EF"/>
+            </a:solidFill>
             <a:prstDash val="solid"/>
           </a:ln>
         </p:spPr>
         <p:txBody>
           <a:bodyPr xmlns:a="http://schemas.openxmlformats.org/drawingml/2006/main" lIns="28575" tIns="19050" rIns="28575" bIns="19050" anchor="ctr">
-            <a:normAutofit fontScale="95711"/>
+            <a:noAutofit/>
           </a:bodyPr>
           <a:lstStyle xmlns:a="http://schemas.openxmlformats.org/drawingml/2006/main"/>
           <a:p xmlns:a="http://schemas.openxmlformats.org/drawingml/2006/main">
             <a:pPr algn="ctr">
-              <a:defRPr sz="750" b="0">
+              <a:defRPr sz="1200" b="0">
                 <a:solidFill>
                   <a:srgbClr val="475569"/>
                 </a:solidFill>
@@ -2845,7 +2618,7 @@
               </a:defRPr>
             </a:pPr>
             <a:r>
-              <a:rPr sz="750" b="0">
+              <a:rPr sz="1200" b="0">
                 <a:solidFill>
                   <a:srgbClr val="475569"/>
                 </a:solidFill>
@@ -2853,40 +2626,17 @@
                 <a:ea typeface="Microsoft YaHei"/>
                 <a:cs typeface="Microsoft YaHei"/>
               </a:rPr>
-              <a:t>陈浩</a:t>
-            </a:r>
-          </a:p>
-          <a:p xmlns:a="http://schemas.openxmlformats.org/drawingml/2006/main">
-            <a:pPr algn="ctr">
-              <a:defRPr sz="750" b="0">
-                <a:solidFill>
-                  <a:srgbClr val="475569"/>
-                </a:solidFill>
-                <a:latin typeface="Microsoft YaHei"/>
-                <a:ea typeface="Microsoft YaHei"/>
-                <a:cs typeface="Microsoft YaHei"/>
-              </a:defRPr>
-            </a:pPr>
-            <a:r>
-              <a:rPr sz="750" b="0">
-                <a:solidFill>
-                  <a:srgbClr val="475569"/>
-                </a:solidFill>
-                <a:latin typeface="Microsoft YaHei"/>
-                <a:ea typeface="Microsoft YaHei"/>
-                <a:cs typeface="Microsoft YaHei"/>
-              </a:rPr>
-              <a:t>测试</a:t>
+              <a:t>后端</a:t>
             </a:r>
           </a:p>
         </p:txBody>
       </p:sp>
       <p:sp>
         <p:nvSpPr>
-          <p:cNvPr id="37" name="">
-            <a:extLst xmlns:a="http://schemas.openxmlformats.org/drawingml/2006/main">
-              <a:ext uri="{FF2B5EF4-FFF2-40B4-BE49-F238E27FC236}">
-                <a16:creationId xmlns:a16="http://schemas.microsoft.com/office/drawing/2014/main" id="{B44221FB-9FFD-4432-9D32-FE18FCEF267A}"/>
+          <p:cNvPr id="34" name="">
+            <a:extLst xmlns:a="http://schemas.openxmlformats.org/drawingml/2006/main">
+              <a:ext uri="{FF2B5EF4-FFF2-40B4-BE49-F238E27FC236}">
+                <a16:creationId xmlns:a16="http://schemas.microsoft.com/office/drawing/2014/main" id="{BC0A6288-5CC0-469B-9772-B77D65291BED}"/>
               </a:ext>
             </a:extLst>
           </p:cNvPr>
@@ -2897,18 +2647,18 @@
         </p:nvSpPr>
         <p:spPr>
           <a:xfrm xmlns:a="http://schemas.openxmlformats.org/drawingml/2006/main">
-            <a:off x="10325100" y="2876550"/>
-            <a:ext cx="876300" cy="876300"/>
+            <a:off x="6591300" y="4810125"/>
+            <a:ext cx="571500" cy="571500"/>
           </a:xfrm>
           <a:prstGeom xmlns:a="http://schemas.openxmlformats.org/drawingml/2006/main" prst="ellipse">
             <a:avLst/>
           </a:prstGeom>
           <a:solidFill xmlns:a="http://schemas.openxmlformats.org/drawingml/2006/main">
-            <a:srgbClr val="EAF2FA"/>
+            <a:srgbClr val="FFFFFF"/>
           </a:solidFill>
           <a:ln xmlns:a="http://schemas.openxmlformats.org/drawingml/2006/main" w="23813">
             <a:solidFill>
-              <a:srgbClr val="1677C8"/>
+              <a:srgbClr val="E3AF45"/>
             </a:solidFill>
             <a:prstDash val="solid"/>
           </a:ln>
@@ -2920,13 +2670,13 @@
           <a:fontRef xmlns:a="http://schemas.openxmlformats.org/drawingml/2006/main" idx="major"/>
         </p:style>
         <p:txBody>
-          <a:bodyPr xmlns:a="http://schemas.openxmlformats.org/drawingml/2006/main" lIns="114300" tIns="76200" rIns="114300" bIns="76200" anchor="ctr">
-            <a:normAutofit fontScale="85769"/>
+          <a:bodyPr xmlns:a="http://schemas.openxmlformats.org/drawingml/2006/main" lIns="0" tIns="0" rIns="0" bIns="0" anchor="ctr">
+            <a:normAutofit fontScale="100000"/>
           </a:bodyPr>
           <a:lstStyle xmlns:a="http://schemas.openxmlformats.org/drawingml/2006/main"/>
           <a:p xmlns:a="http://schemas.openxmlformats.org/drawingml/2006/main">
             <a:pPr algn="ctr">
-              <a:defRPr sz="1800" b="1">
+              <a:defRPr sz="1275" b="1">
                 <a:solidFill>
                   <a:srgbClr val="1677C8"/>
                 </a:solidFill>
@@ -2936,7 +2686,294 @@
               </a:defRPr>
             </a:pPr>
             <a:r>
-              <a:rPr sz="1800" b="1">
+              <a:rPr sz="1275" b="1">
+                <a:solidFill>
+                  <a:srgbClr val="1677C8"/>
+                </a:solidFill>
+                <a:latin typeface="Microsoft YaHei"/>
+                <a:ea typeface="Microsoft YaHei"/>
+                <a:cs typeface="Microsoft YaHei"/>
+              </a:rPr>
+              <a:t>陈浩</a:t>
+            </a:r>
+          </a:p>
+        </p:txBody>
+      </p:sp>
+      <p:sp>
+        <p:nvSpPr>
+          <p:cNvPr id="35" name="PPAGENT_QA|parent=org-member-1-2|domains=organization-members">
+            <a:extLst xmlns:a="http://schemas.openxmlformats.org/drawingml/2006/main">
+              <a:ext uri="{FF2B5EF4-FFF2-40B4-BE49-F238E27FC236}">
+                <a16:creationId xmlns:a16="http://schemas.microsoft.com/office/drawing/2014/main" id="{A8630BEF-0C67-4545-A8E2-BF7B7BB3B1C8}"/>
+              </a:ext>
+            </a:extLst>
+          </p:cNvPr>
+          <p:cNvSpPr>
+            <a:spLocks xmlns:a="http://schemas.openxmlformats.org/drawingml/2006/main" noGrp="1"/>
+          </p:cNvSpPr>
+          <p:nvPr/>
+        </p:nvSpPr>
+        <p:spPr>
+          <a:xfrm xmlns:a="http://schemas.openxmlformats.org/drawingml/2006/main">
+            <a:off x="6505575" y="5438775"/>
+            <a:ext cx="742950" cy="457200"/>
+          </a:xfrm>
+          <a:prstGeom xmlns:a="http://schemas.openxmlformats.org/drawingml/2006/main" prst="roundRect">
+            <a:avLst>
+              <a:gd name="adj" fmla="val 25000"/>
+            </a:avLst>
+          </a:prstGeom>
+          <a:solidFill xmlns:a="http://schemas.openxmlformats.org/drawingml/2006/main">
+            <a:srgbClr val="F1F5F9"/>
+          </a:solidFill>
+          <a:ln xmlns:a="http://schemas.openxmlformats.org/drawingml/2006/main" w="9525">
+            <a:solidFill>
+              <a:srgbClr val="E1E8EF"/>
+            </a:solidFill>
+            <a:prstDash val="solid"/>
+          </a:ln>
+        </p:spPr>
+        <p:txBody>
+          <a:bodyPr xmlns:a="http://schemas.openxmlformats.org/drawingml/2006/main" lIns="28575" tIns="19050" rIns="28575" bIns="19050" anchor="ctr">
+            <a:noAutofit/>
+          </a:bodyPr>
+          <a:lstStyle xmlns:a="http://schemas.openxmlformats.org/drawingml/2006/main"/>
+          <a:p xmlns:a="http://schemas.openxmlformats.org/drawingml/2006/main">
+            <a:pPr algn="ctr">
+              <a:defRPr sz="1200" b="0">
+                <a:solidFill>
+                  <a:srgbClr val="475569"/>
+                </a:solidFill>
+                <a:latin typeface="Microsoft YaHei"/>
+                <a:ea typeface="Microsoft YaHei"/>
+                <a:cs typeface="Microsoft YaHei"/>
+              </a:defRPr>
+            </a:pPr>
+            <a:r>
+              <a:rPr sz="1200" b="0">
+                <a:solidFill>
+                  <a:srgbClr val="475569"/>
+                </a:solidFill>
+                <a:latin typeface="Microsoft YaHei"/>
+                <a:ea typeface="Microsoft YaHei"/>
+                <a:cs typeface="Microsoft YaHei"/>
+              </a:rPr>
+              <a:t>测试</a:t>
+            </a:r>
+          </a:p>
+        </p:txBody>
+      </p:sp>
+      <p:sp>
+        <p:nvSpPr>
+          <p:cNvPr id="36" name="">
+            <a:extLst xmlns:a="http://schemas.openxmlformats.org/drawingml/2006/main">
+              <a:ext uri="{FF2B5EF4-FFF2-40B4-BE49-F238E27FC236}">
+                <a16:creationId xmlns:a16="http://schemas.microsoft.com/office/drawing/2014/main" id="{BDAB7D7F-8965-41D5-B0E4-FDB8028AD054}"/>
+              </a:ext>
+            </a:extLst>
+          </p:cNvPr>
+          <p:cNvSpPr>
+            <a:spLocks xmlns:a="http://schemas.openxmlformats.org/drawingml/2006/main" noGrp="1"/>
+          </p:cNvSpPr>
+          <p:nvPr/>
+        </p:nvSpPr>
+        <p:spPr>
+          <a:xfrm xmlns:a="http://schemas.openxmlformats.org/drawingml/2006/main" flipH="0" flipV="0">
+            <a:off x="10763250" y="3771900"/>
+            <a:ext cx="0" cy="704850"/>
+          </a:xfrm>
+          <a:prstGeom xmlns:a="http://schemas.openxmlformats.org/drawingml/2006/main" prst="line">
+            <a:avLst/>
+          </a:prstGeom>
+          <a:noFill xmlns:a="http://schemas.openxmlformats.org/drawingml/2006/main"/>
+          <a:ln xmlns:a="http://schemas.openxmlformats.org/drawingml/2006/main" w="19050">
+            <a:solidFill>
+              <a:srgbClr val="E3AF45"/>
+            </a:solidFill>
+            <a:prstDash val="solid"/>
+          </a:ln>
+        </p:spPr>
+      </p:sp>
+      <p:sp>
+        <p:nvSpPr>
+          <p:cNvPr id="37" name="">
+            <a:extLst xmlns:a="http://schemas.openxmlformats.org/drawingml/2006/main">
+              <a:ext uri="{FF2B5EF4-FFF2-40B4-BE49-F238E27FC236}">
+                <a16:creationId xmlns:a16="http://schemas.microsoft.com/office/drawing/2014/main" id="{BB56484E-48BD-4269-AD46-E5EBB17C6654}"/>
+              </a:ext>
+            </a:extLst>
+          </p:cNvPr>
+          <p:cNvSpPr>
+            <a:spLocks xmlns:a="http://schemas.openxmlformats.org/drawingml/2006/main" noGrp="1"/>
+          </p:cNvSpPr>
+          <p:nvPr/>
+        </p:nvSpPr>
+        <p:spPr>
+          <a:xfrm xmlns:a="http://schemas.openxmlformats.org/drawingml/2006/main" flipH="0" flipV="0">
+            <a:off x="10372725" y="4476750"/>
+            <a:ext cx="781050" cy="0"/>
+          </a:xfrm>
+          <a:prstGeom xmlns:a="http://schemas.openxmlformats.org/drawingml/2006/main" prst="line">
+            <a:avLst/>
+          </a:prstGeom>
+          <a:noFill xmlns:a="http://schemas.openxmlformats.org/drawingml/2006/main"/>
+          <a:ln xmlns:a="http://schemas.openxmlformats.org/drawingml/2006/main" w="19050">
+            <a:solidFill>
+              <a:srgbClr val="E3AF45"/>
+            </a:solidFill>
+            <a:prstDash val="solid"/>
+          </a:ln>
+        </p:spPr>
+      </p:sp>
+      <p:sp>
+        <p:nvSpPr>
+          <p:cNvPr id="38" name="">
+            <a:extLst xmlns:a="http://schemas.openxmlformats.org/drawingml/2006/main">
+              <a:ext uri="{FF2B5EF4-FFF2-40B4-BE49-F238E27FC236}">
+                <a16:creationId xmlns:a16="http://schemas.microsoft.com/office/drawing/2014/main" id="{D05B4433-6413-446B-918D-62698C00406C}"/>
+              </a:ext>
+            </a:extLst>
+          </p:cNvPr>
+          <p:cNvSpPr>
+            <a:spLocks xmlns:a="http://schemas.openxmlformats.org/drawingml/2006/main" noGrp="1"/>
+          </p:cNvSpPr>
+          <p:nvPr/>
+        </p:nvSpPr>
+        <p:spPr>
+          <a:xfrm xmlns:a="http://schemas.openxmlformats.org/drawingml/2006/main" flipH="0" flipV="0">
+            <a:off x="10372725" y="4476750"/>
+            <a:ext cx="0" cy="333375"/>
+          </a:xfrm>
+          <a:prstGeom xmlns:a="http://schemas.openxmlformats.org/drawingml/2006/main" prst="line">
+            <a:avLst/>
+          </a:prstGeom>
+          <a:noFill xmlns:a="http://schemas.openxmlformats.org/drawingml/2006/main"/>
+          <a:ln xmlns:a="http://schemas.openxmlformats.org/drawingml/2006/main" w="19050">
+            <a:solidFill>
+              <a:srgbClr val="E3AF45"/>
+            </a:solidFill>
+            <a:prstDash val="solid"/>
+          </a:ln>
+        </p:spPr>
+      </p:sp>
+      <p:sp>
+        <p:nvSpPr>
+          <p:cNvPr id="39" name="">
+            <a:extLst xmlns:a="http://schemas.openxmlformats.org/drawingml/2006/main">
+              <a:ext uri="{FF2B5EF4-FFF2-40B4-BE49-F238E27FC236}">
+                <a16:creationId xmlns:a16="http://schemas.microsoft.com/office/drawing/2014/main" id="{5630482C-7F06-46DC-980E-16796548FFA3}"/>
+              </a:ext>
+            </a:extLst>
+          </p:cNvPr>
+          <p:cNvSpPr>
+            <a:spLocks xmlns:a="http://schemas.openxmlformats.org/drawingml/2006/main" noGrp="1"/>
+          </p:cNvSpPr>
+          <p:nvPr/>
+        </p:nvSpPr>
+        <p:spPr>
+          <a:xfrm xmlns:a="http://schemas.openxmlformats.org/drawingml/2006/main" flipH="0" flipV="0">
+            <a:off x="11153775" y="4476750"/>
+            <a:ext cx="0" cy="333375"/>
+          </a:xfrm>
+          <a:prstGeom xmlns:a="http://schemas.openxmlformats.org/drawingml/2006/main" prst="line">
+            <a:avLst/>
+          </a:prstGeom>
+          <a:noFill xmlns:a="http://schemas.openxmlformats.org/drawingml/2006/main"/>
+          <a:ln xmlns:a="http://schemas.openxmlformats.org/drawingml/2006/main" w="19050">
+            <a:solidFill>
+              <a:srgbClr val="E3AF45"/>
+            </a:solidFill>
+            <a:prstDash val="solid"/>
+          </a:ln>
+        </p:spPr>
+      </p:sp>
+      <p:sp>
+        <p:nvSpPr>
+          <p:cNvPr id="40" name="">
+            <a:extLst xmlns:a="http://schemas.openxmlformats.org/drawingml/2006/main">
+              <a:ext uri="{FF2B5EF4-FFF2-40B4-BE49-F238E27FC236}">
+                <a16:creationId xmlns:a16="http://schemas.microsoft.com/office/drawing/2014/main" id="{1302AEE4-210A-483C-BD06-BA1FA9864A84}"/>
+              </a:ext>
+            </a:extLst>
+          </p:cNvPr>
+          <p:cNvSpPr>
+            <a:spLocks xmlns:a="http://schemas.openxmlformats.org/drawingml/2006/main" noGrp="1"/>
+          </p:cNvSpPr>
+          <p:nvPr/>
+        </p:nvSpPr>
+        <p:spPr>
+          <a:xfrm xmlns:a="http://schemas.openxmlformats.org/drawingml/2006/main">
+            <a:off x="10287000" y="2857500"/>
+            <a:ext cx="952500" cy="952500"/>
+          </a:xfrm>
+          <a:prstGeom xmlns:a="http://schemas.openxmlformats.org/drawingml/2006/main" prst="ellipse">
+            <a:avLst/>
+          </a:prstGeom>
+          <a:solidFill xmlns:a="http://schemas.openxmlformats.org/drawingml/2006/main">
+            <a:srgbClr val="E4EDF6"/>
+          </a:solidFill>
+          <a:ln xmlns:a="http://schemas.openxmlformats.org/drawingml/2006/main" w="0">
+            <a:noFill/>
+            <a:prstDash val="solid"/>
+          </a:ln>
+        </p:spPr>
+      </p:sp>
+      <p:sp>
+        <p:nvSpPr>
+          <p:cNvPr id="41" name="">
+            <a:extLst xmlns:a="http://schemas.openxmlformats.org/drawingml/2006/main">
+              <a:ext uri="{FF2B5EF4-FFF2-40B4-BE49-F238E27FC236}">
+                <a16:creationId xmlns:a16="http://schemas.microsoft.com/office/drawing/2014/main" id="{6956ACA8-7001-471A-B9D0-CCA1257C5BE1}"/>
+              </a:ext>
+            </a:extLst>
+          </p:cNvPr>
+          <p:cNvSpPr>
+            <a:spLocks xmlns:a="http://schemas.openxmlformats.org/drawingml/2006/main" noGrp="1"/>
+          </p:cNvSpPr>
+          <p:nvPr/>
+        </p:nvSpPr>
+        <p:spPr>
+          <a:xfrm xmlns:a="http://schemas.openxmlformats.org/drawingml/2006/main">
+            <a:off x="10382250" y="2952750"/>
+            <a:ext cx="762000" cy="762000"/>
+          </a:xfrm>
+          <a:prstGeom xmlns:a="http://schemas.openxmlformats.org/drawingml/2006/main" prst="ellipse">
+            <a:avLst/>
+          </a:prstGeom>
+          <a:solidFill xmlns:a="http://schemas.openxmlformats.org/drawingml/2006/main">
+            <a:srgbClr val="FFFFFF"/>
+          </a:solidFill>
+          <a:ln xmlns:a="http://schemas.openxmlformats.org/drawingml/2006/main" w="23813">
+            <a:solidFill>
+              <a:srgbClr val="1677C8"/>
+            </a:solidFill>
+            <a:prstDash val="solid"/>
+          </a:ln>
+        </p:spPr>
+        <p:style>
+          <a:lnRef xmlns:a="http://schemas.openxmlformats.org/drawingml/2006/main" idx="0"/>
+          <a:fillRef xmlns:a="http://schemas.openxmlformats.org/drawingml/2006/main" idx="0"/>
+          <a:effectRef xmlns:a="http://schemas.openxmlformats.org/drawingml/2006/main" idx="6"/>
+          <a:fontRef xmlns:a="http://schemas.openxmlformats.org/drawingml/2006/main" idx="major"/>
+        </p:style>
+        <p:txBody>
+          <a:bodyPr xmlns:a="http://schemas.openxmlformats.org/drawingml/2006/main" lIns="0" tIns="0" rIns="0" bIns="0" anchor="ctr">
+            <a:normAutofit fontScale="100000"/>
+          </a:bodyPr>
+          <a:lstStyle xmlns:a="http://schemas.openxmlformats.org/drawingml/2006/main"/>
+          <a:p xmlns:a="http://schemas.openxmlformats.org/drawingml/2006/main">
+            <a:pPr algn="ctr">
+              <a:defRPr sz="1575" b="1">
+                <a:solidFill>
+                  <a:srgbClr val="1677C8"/>
+                </a:solidFill>
+                <a:latin typeface="Microsoft YaHei"/>
+                <a:ea typeface="Microsoft YaHei"/>
+                <a:cs typeface="Microsoft YaHei"/>
+              </a:defRPr>
+            </a:pPr>
+            <a:r>
+              <a:rPr sz="1575" b="1">
                 <a:solidFill>
                   <a:srgbClr val="1677C8"/>
                 </a:solidFill>
@@ -2951,10 +2988,10 @@
       </p:sp>
       <p:sp>
         <p:nvSpPr>
-          <p:cNvPr id="38" name="">
-            <a:extLst xmlns:a="http://schemas.openxmlformats.org/drawingml/2006/main">
-              <a:ext uri="{FF2B5EF4-FFF2-40B4-BE49-F238E27FC236}">
-                <a16:creationId xmlns:a16="http://schemas.microsoft.com/office/drawing/2014/main" id="{5B69D4DB-5998-404B-8A44-372A00029E23}"/>
+          <p:cNvPr id="42" name="PPAGENT_QA|parent=org-department-2|domains=organization-departments">
+            <a:extLst xmlns:a="http://schemas.openxmlformats.org/drawingml/2006/main">
+              <a:ext uri="{FF2B5EF4-FFF2-40B4-BE49-F238E27FC236}">
+                <a16:creationId xmlns:a16="http://schemas.microsoft.com/office/drawing/2014/main" id="{368DCA72-49A6-48FC-9117-D079D01B50B6}"/>
               </a:ext>
             </a:extLst>
           </p:cNvPr>
@@ -2965,12 +3002,12 @@
         </p:nvSpPr>
         <p:spPr>
           <a:xfrm xmlns:a="http://schemas.openxmlformats.org/drawingml/2006/main">
-            <a:off x="9810750" y="3810000"/>
-            <a:ext cx="1905000" cy="342900"/>
+            <a:off x="9734550" y="3810000"/>
+            <a:ext cx="2057400" cy="361950"/>
           </a:xfrm>
           <a:prstGeom xmlns:a="http://schemas.openxmlformats.org/drawingml/2006/main" prst="roundRect">
             <a:avLst>
-              <a:gd name="adj" fmla="val 33333"/>
+              <a:gd name="adj" fmla="val 31579"/>
             </a:avLst>
           </a:prstGeom>
           <a:solidFill xmlns:a="http://schemas.openxmlformats.org/drawingml/2006/main">
@@ -2978,68 +3015,6 @@
           </a:solidFill>
           <a:ln xmlns:a="http://schemas.openxmlformats.org/drawingml/2006/main" w="0">
             <a:noFill/>
-            <a:prstDash val="solid"/>
-          </a:ln>
-        </p:spPr>
-        <p:txBody>
-          <a:bodyPr xmlns:a="http://schemas.openxmlformats.org/drawingml/2006/main" lIns="47625" tIns="19050" rIns="47625" bIns="19050" anchor="ctr">
-            <a:normAutofit fontScale="100000"/>
-          </a:bodyPr>
-          <a:lstStyle xmlns:a="http://schemas.openxmlformats.org/drawingml/2006/main"/>
-          <a:p xmlns:a="http://schemas.openxmlformats.org/drawingml/2006/main">
-            <a:pPr algn="ctr">
-              <a:defRPr sz="1050" b="1">
-                <a:solidFill>
-                  <a:srgbClr val="FFFFFF"/>
-                </a:solidFill>
-                <a:latin typeface="Microsoft YaHei"/>
-                <a:ea typeface="Microsoft YaHei"/>
-                <a:cs typeface="Microsoft YaHei"/>
-              </a:defRPr>
-            </a:pPr>
-            <a:r>
-              <a:rPr sz="1050" b="1">
-                <a:solidFill>
-                  <a:srgbClr val="FFFFFF"/>
-                </a:solidFill>
-                <a:latin typeface="Microsoft YaHei"/>
-                <a:ea typeface="Microsoft YaHei"/>
-                <a:cs typeface="Microsoft YaHei"/>
-              </a:rPr>
-              <a:t>陈军｜运营组</a:t>
-            </a:r>
-          </a:p>
-        </p:txBody>
-      </p:sp>
-      <p:sp>
-        <p:nvSpPr>
-          <p:cNvPr id="39" name="">
-            <a:extLst xmlns:a="http://schemas.openxmlformats.org/drawingml/2006/main">
-              <a:ext uri="{FF2B5EF4-FFF2-40B4-BE49-F238E27FC236}">
-                <a16:creationId xmlns:a16="http://schemas.microsoft.com/office/drawing/2014/main" id="{4480F2CE-7234-4271-B927-6CE7A986B24D}"/>
-              </a:ext>
-            </a:extLst>
-          </p:cNvPr>
-          <p:cNvSpPr>
-            <a:spLocks xmlns:a="http://schemas.openxmlformats.org/drawingml/2006/main" noGrp="1"/>
-          </p:cNvSpPr>
-          <p:nvPr/>
-        </p:nvSpPr>
-        <p:spPr>
-          <a:xfrm xmlns:a="http://schemas.openxmlformats.org/drawingml/2006/main">
-            <a:off x="10086975" y="4905375"/>
-            <a:ext cx="628650" cy="628650"/>
-          </a:xfrm>
-          <a:prstGeom xmlns:a="http://schemas.openxmlformats.org/drawingml/2006/main" prst="ellipse">
-            <a:avLst/>
-          </a:prstGeom>
-          <a:solidFill xmlns:a="http://schemas.openxmlformats.org/drawingml/2006/main">
-            <a:srgbClr val="FFFFFF"/>
-          </a:solidFill>
-          <a:ln xmlns:a="http://schemas.openxmlformats.org/drawingml/2006/main" w="19050">
-            <a:solidFill>
-              <a:srgbClr val="00A8D8"/>
-            </a:solidFill>
             <a:prstDash val="solid"/>
           </a:ln>
         </p:spPr>
@@ -3050,15 +3025,15 @@
           <a:fontRef xmlns:a="http://schemas.openxmlformats.org/drawingml/2006/main" idx="major"/>
         </p:style>
         <p:txBody>
-          <a:bodyPr xmlns:a="http://schemas.openxmlformats.org/drawingml/2006/main" lIns="114300" tIns="76200" rIns="114300" bIns="76200" anchor="ctr">
-            <a:normAutofit fontScale="70993"/>
+          <a:bodyPr xmlns:a="http://schemas.openxmlformats.org/drawingml/2006/main" lIns="57150" tIns="19050" rIns="57150" bIns="19050" anchor="ctr">
+            <a:normAutofit fontScale="100000"/>
           </a:bodyPr>
           <a:lstStyle xmlns:a="http://schemas.openxmlformats.org/drawingml/2006/main"/>
           <a:p xmlns:a="http://schemas.openxmlformats.org/drawingml/2006/main">
             <a:pPr algn="ctr">
-              <a:defRPr sz="1350" b="1">
-                <a:solidFill>
-                  <a:srgbClr val="00A8D8"/>
+              <a:defRPr sz="1200" b="1">
+                <a:solidFill>
+                  <a:srgbClr val="FFFFFF"/>
                 </a:solidFill>
                 <a:latin typeface="Microsoft YaHei"/>
                 <a:ea typeface="Microsoft YaHei"/>
@@ -3066,25 +3041,25 @@
               </a:defRPr>
             </a:pPr>
             <a:r>
-              <a:rPr sz="1350" b="1">
-                <a:solidFill>
-                  <a:srgbClr val="00A8D8"/>
+              <a:rPr sz="1200" b="1">
+                <a:solidFill>
+                  <a:srgbClr val="FFFFFF"/>
                 </a:solidFill>
                 <a:latin typeface="Microsoft YaHei"/>
                 <a:ea typeface="Microsoft YaHei"/>
                 <a:cs typeface="Microsoft YaHei"/>
               </a:rPr>
-              <a:t>林清</a:t>
+              <a:t>陈军｜运营组</a:t>
             </a:r>
           </a:p>
         </p:txBody>
       </p:sp>
       <p:sp>
         <p:nvSpPr>
-          <p:cNvPr id="40" name="">
-            <a:extLst xmlns:a="http://schemas.openxmlformats.org/drawingml/2006/main">
-              <a:ext uri="{FF2B5EF4-FFF2-40B4-BE49-F238E27FC236}">
-                <a16:creationId xmlns:a16="http://schemas.microsoft.com/office/drawing/2014/main" id="{47BCFADB-34C9-4508-A212-68A16DDAADFE}"/>
+          <p:cNvPr id="43" name="">
+            <a:extLst xmlns:a="http://schemas.openxmlformats.org/drawingml/2006/main">
+              <a:ext uri="{FF2B5EF4-FFF2-40B4-BE49-F238E27FC236}">
+                <a16:creationId xmlns:a16="http://schemas.microsoft.com/office/drawing/2014/main" id="{12EAD27E-26CF-46B2-9DC5-0E36978116BE}"/>
               </a:ext>
             </a:extLst>
           </p:cNvPr>
@@ -3095,93 +3070,8 @@
         </p:nvSpPr>
         <p:spPr>
           <a:xfrm xmlns:a="http://schemas.openxmlformats.org/drawingml/2006/main">
-            <a:off x="9886950" y="5600700"/>
-            <a:ext cx="1028700" cy="323850"/>
-          </a:xfrm>
-          <a:prstGeom xmlns:a="http://schemas.openxmlformats.org/drawingml/2006/main" prst="roundRect">
-            <a:avLst>
-              <a:gd name="adj" fmla="val 35294"/>
-            </a:avLst>
-          </a:prstGeom>
-          <a:solidFill xmlns:a="http://schemas.openxmlformats.org/drawingml/2006/main">
-            <a:srgbClr val="EEF4FA"/>
-          </a:solidFill>
-          <a:ln xmlns:a="http://schemas.openxmlformats.org/drawingml/2006/main" w="0">
-            <a:noFill/>
-            <a:prstDash val="solid"/>
-          </a:ln>
-        </p:spPr>
-        <p:txBody>
-          <a:bodyPr xmlns:a="http://schemas.openxmlformats.org/drawingml/2006/main" lIns="28575" tIns="19050" rIns="28575" bIns="19050" anchor="ctr">
-            <a:normAutofit fontScale="95711"/>
-          </a:bodyPr>
-          <a:lstStyle xmlns:a="http://schemas.openxmlformats.org/drawingml/2006/main"/>
-          <a:p xmlns:a="http://schemas.openxmlformats.org/drawingml/2006/main">
-            <a:pPr algn="ctr">
-              <a:defRPr sz="750" b="0">
-                <a:solidFill>
-                  <a:srgbClr val="475569"/>
-                </a:solidFill>
-                <a:latin typeface="Microsoft YaHei"/>
-                <a:ea typeface="Microsoft YaHei"/>
-                <a:cs typeface="Microsoft YaHei"/>
-              </a:defRPr>
-            </a:pPr>
-            <a:r>
-              <a:rPr sz="750" b="0">
-                <a:solidFill>
-                  <a:srgbClr val="475569"/>
-                </a:solidFill>
-                <a:latin typeface="Microsoft YaHei"/>
-                <a:ea typeface="Microsoft YaHei"/>
-                <a:cs typeface="Microsoft YaHei"/>
-              </a:rPr>
-              <a:t>林清</a:t>
-            </a:r>
-          </a:p>
-          <a:p xmlns:a="http://schemas.openxmlformats.org/drawingml/2006/main">
-            <a:pPr algn="ctr">
-              <a:defRPr sz="750" b="0">
-                <a:solidFill>
-                  <a:srgbClr val="475569"/>
-                </a:solidFill>
-                <a:latin typeface="Microsoft YaHei"/>
-                <a:ea typeface="Microsoft YaHei"/>
-                <a:cs typeface="Microsoft YaHei"/>
-              </a:defRPr>
-            </a:pPr>
-            <a:r>
-              <a:rPr sz="750" b="0">
-                <a:solidFill>
-                  <a:srgbClr val="475569"/>
-                </a:solidFill>
-                <a:latin typeface="Microsoft YaHei"/>
-                <a:ea typeface="Microsoft YaHei"/>
-                <a:cs typeface="Microsoft YaHei"/>
-              </a:rPr>
-              <a:t>内容</a:t>
-            </a:r>
-          </a:p>
-        </p:txBody>
-      </p:sp>
-      <p:sp>
-        <p:nvSpPr>
-          <p:cNvPr id="41" name="">
-            <a:extLst xmlns:a="http://schemas.openxmlformats.org/drawingml/2006/main">
-              <a:ext uri="{FF2B5EF4-FFF2-40B4-BE49-F238E27FC236}">
-                <a16:creationId xmlns:a16="http://schemas.microsoft.com/office/drawing/2014/main" id="{EE70BDB0-F875-45E2-B12A-8B7A0834A393}"/>
-              </a:ext>
-            </a:extLst>
-          </p:cNvPr>
-          <p:cNvSpPr>
-            <a:spLocks xmlns:a="http://schemas.openxmlformats.org/drawingml/2006/main" noGrp="1"/>
-          </p:cNvSpPr>
-          <p:nvPr/>
-        </p:nvSpPr>
-        <p:spPr>
-          <a:xfrm xmlns:a="http://schemas.openxmlformats.org/drawingml/2006/main">
-            <a:off x="10810875" y="4905375"/>
-            <a:ext cx="628650" cy="628650"/>
+            <a:off x="10086975" y="4810125"/>
+            <a:ext cx="571500" cy="571500"/>
           </a:xfrm>
           <a:prstGeom xmlns:a="http://schemas.openxmlformats.org/drawingml/2006/main" prst="ellipse">
             <a:avLst/>
@@ -3189,9 +3079,9 @@
           <a:solidFill xmlns:a="http://schemas.openxmlformats.org/drawingml/2006/main">
             <a:srgbClr val="FFFFFF"/>
           </a:solidFill>
-          <a:ln xmlns:a="http://schemas.openxmlformats.org/drawingml/2006/main" w="19050">
+          <a:ln xmlns:a="http://schemas.openxmlformats.org/drawingml/2006/main" w="23813">
             <a:solidFill>
-              <a:srgbClr val="00A8D8"/>
+              <a:srgbClr val="E3AF45"/>
             </a:solidFill>
             <a:prstDash val="solid"/>
           </a:ln>
@@ -3203,15 +3093,15 @@
           <a:fontRef xmlns:a="http://schemas.openxmlformats.org/drawingml/2006/main" idx="major"/>
         </p:style>
         <p:txBody>
-          <a:bodyPr xmlns:a="http://schemas.openxmlformats.org/drawingml/2006/main" lIns="114300" tIns="76200" rIns="114300" bIns="76200" anchor="ctr">
-            <a:normAutofit fontScale="70993"/>
+          <a:bodyPr xmlns:a="http://schemas.openxmlformats.org/drawingml/2006/main" lIns="0" tIns="0" rIns="0" bIns="0" anchor="ctr">
+            <a:normAutofit fontScale="100000"/>
           </a:bodyPr>
           <a:lstStyle xmlns:a="http://schemas.openxmlformats.org/drawingml/2006/main"/>
           <a:p xmlns:a="http://schemas.openxmlformats.org/drawingml/2006/main">
             <a:pPr algn="ctr">
-              <a:defRPr sz="1350" b="1">
-                <a:solidFill>
-                  <a:srgbClr val="00A8D8"/>
+              <a:defRPr sz="1275" b="1">
+                <a:solidFill>
+                  <a:srgbClr val="1677C8"/>
                 </a:solidFill>
                 <a:latin typeface="Microsoft YaHei"/>
                 <a:ea typeface="Microsoft YaHei"/>
@@ -3219,9 +3109,141 @@
               </a:defRPr>
             </a:pPr>
             <a:r>
-              <a:rPr sz="1350" b="1">
-                <a:solidFill>
-                  <a:srgbClr val="00A8D8"/>
+              <a:rPr sz="1275" b="1">
+                <a:solidFill>
+                  <a:srgbClr val="1677C8"/>
+                </a:solidFill>
+                <a:latin typeface="Microsoft YaHei"/>
+                <a:ea typeface="Microsoft YaHei"/>
+                <a:cs typeface="Microsoft YaHei"/>
+              </a:rPr>
+              <a:t>林清</a:t>
+            </a:r>
+          </a:p>
+        </p:txBody>
+      </p:sp>
+      <p:sp>
+        <p:nvSpPr>
+          <p:cNvPr id="44" name="PPAGENT_QA|parent=org-member-2-0|domains=organization-members">
+            <a:extLst xmlns:a="http://schemas.openxmlformats.org/drawingml/2006/main">
+              <a:ext uri="{FF2B5EF4-FFF2-40B4-BE49-F238E27FC236}">
+                <a16:creationId xmlns:a16="http://schemas.microsoft.com/office/drawing/2014/main" id="{E01462C7-98DD-47F4-B488-59AB500C26F3}"/>
+              </a:ext>
+            </a:extLst>
+          </p:cNvPr>
+          <p:cNvSpPr>
+            <a:spLocks xmlns:a="http://schemas.openxmlformats.org/drawingml/2006/main" noGrp="1"/>
+          </p:cNvSpPr>
+          <p:nvPr/>
+        </p:nvSpPr>
+        <p:spPr>
+          <a:xfrm xmlns:a="http://schemas.openxmlformats.org/drawingml/2006/main">
+            <a:off x="10001250" y="5438775"/>
+            <a:ext cx="742950" cy="457200"/>
+          </a:xfrm>
+          <a:prstGeom xmlns:a="http://schemas.openxmlformats.org/drawingml/2006/main" prst="roundRect">
+            <a:avLst>
+              <a:gd name="adj" fmla="val 25000"/>
+            </a:avLst>
+          </a:prstGeom>
+          <a:solidFill xmlns:a="http://schemas.openxmlformats.org/drawingml/2006/main">
+            <a:srgbClr val="F1F5F9"/>
+          </a:solidFill>
+          <a:ln xmlns:a="http://schemas.openxmlformats.org/drawingml/2006/main" w="9525">
+            <a:solidFill>
+              <a:srgbClr val="E1E8EF"/>
+            </a:solidFill>
+            <a:prstDash val="solid"/>
+          </a:ln>
+        </p:spPr>
+        <p:txBody>
+          <a:bodyPr xmlns:a="http://schemas.openxmlformats.org/drawingml/2006/main" lIns="28575" tIns="19050" rIns="28575" bIns="19050" anchor="ctr">
+            <a:noAutofit/>
+          </a:bodyPr>
+          <a:lstStyle xmlns:a="http://schemas.openxmlformats.org/drawingml/2006/main"/>
+          <a:p xmlns:a="http://schemas.openxmlformats.org/drawingml/2006/main">
+            <a:pPr algn="ctr">
+              <a:defRPr sz="1200" b="0">
+                <a:solidFill>
+                  <a:srgbClr val="475569"/>
+                </a:solidFill>
+                <a:latin typeface="Microsoft YaHei"/>
+                <a:ea typeface="Microsoft YaHei"/>
+                <a:cs typeface="Microsoft YaHei"/>
+              </a:defRPr>
+            </a:pPr>
+            <a:r>
+              <a:rPr sz="1200" b="0">
+                <a:solidFill>
+                  <a:srgbClr val="475569"/>
+                </a:solidFill>
+                <a:latin typeface="Microsoft YaHei"/>
+                <a:ea typeface="Microsoft YaHei"/>
+                <a:cs typeface="Microsoft YaHei"/>
+              </a:rPr>
+              <a:t>内容</a:t>
+            </a:r>
+          </a:p>
+        </p:txBody>
+      </p:sp>
+      <p:sp>
+        <p:nvSpPr>
+          <p:cNvPr id="45" name="">
+            <a:extLst xmlns:a="http://schemas.openxmlformats.org/drawingml/2006/main">
+              <a:ext uri="{FF2B5EF4-FFF2-40B4-BE49-F238E27FC236}">
+                <a16:creationId xmlns:a16="http://schemas.microsoft.com/office/drawing/2014/main" id="{5C92834C-085C-4837-B2F0-7C29BD160749}"/>
+              </a:ext>
+            </a:extLst>
+          </p:cNvPr>
+          <p:cNvSpPr>
+            <a:spLocks xmlns:a="http://schemas.openxmlformats.org/drawingml/2006/main" noGrp="1"/>
+          </p:cNvSpPr>
+          <p:nvPr/>
+        </p:nvSpPr>
+        <p:spPr>
+          <a:xfrm xmlns:a="http://schemas.openxmlformats.org/drawingml/2006/main">
+            <a:off x="10868025" y="4810125"/>
+            <a:ext cx="571500" cy="571500"/>
+          </a:xfrm>
+          <a:prstGeom xmlns:a="http://schemas.openxmlformats.org/drawingml/2006/main" prst="ellipse">
+            <a:avLst/>
+          </a:prstGeom>
+          <a:solidFill xmlns:a="http://schemas.openxmlformats.org/drawingml/2006/main">
+            <a:srgbClr val="FFFFFF"/>
+          </a:solidFill>
+          <a:ln xmlns:a="http://schemas.openxmlformats.org/drawingml/2006/main" w="23813">
+            <a:solidFill>
+              <a:srgbClr val="E3AF45"/>
+            </a:solidFill>
+            <a:prstDash val="solid"/>
+          </a:ln>
+        </p:spPr>
+        <p:style>
+          <a:lnRef xmlns:a="http://schemas.openxmlformats.org/drawingml/2006/main" idx="0"/>
+          <a:fillRef xmlns:a="http://schemas.openxmlformats.org/drawingml/2006/main" idx="0"/>
+          <a:effectRef xmlns:a="http://schemas.openxmlformats.org/drawingml/2006/main" idx="4"/>
+          <a:fontRef xmlns:a="http://schemas.openxmlformats.org/drawingml/2006/main" idx="major"/>
+        </p:style>
+        <p:txBody>
+          <a:bodyPr xmlns:a="http://schemas.openxmlformats.org/drawingml/2006/main" lIns="0" tIns="0" rIns="0" bIns="0" anchor="ctr">
+            <a:normAutofit fontScale="100000"/>
+          </a:bodyPr>
+          <a:lstStyle xmlns:a="http://schemas.openxmlformats.org/drawingml/2006/main"/>
+          <a:p xmlns:a="http://schemas.openxmlformats.org/drawingml/2006/main">
+            <a:pPr algn="ctr">
+              <a:defRPr sz="1275" b="1">
+                <a:solidFill>
+                  <a:srgbClr val="1677C8"/>
+                </a:solidFill>
+                <a:latin typeface="Microsoft YaHei"/>
+                <a:ea typeface="Microsoft YaHei"/>
+                <a:cs typeface="Microsoft YaHei"/>
+              </a:defRPr>
+            </a:pPr>
+            <a:r>
+              <a:rPr sz="1275" b="1">
+                <a:solidFill>
+                  <a:srgbClr val="1677C8"/>
                 </a:solidFill>
                 <a:latin typeface="Microsoft YaHei"/>
                 <a:ea typeface="Microsoft YaHei"/>
@@ -3234,10 +3256,10 @@
       </p:sp>
       <p:sp>
         <p:nvSpPr>
-          <p:cNvPr id="42" name="">
-            <a:extLst xmlns:a="http://schemas.openxmlformats.org/drawingml/2006/main">
-              <a:ext uri="{FF2B5EF4-FFF2-40B4-BE49-F238E27FC236}">
-                <a16:creationId xmlns:a16="http://schemas.microsoft.com/office/drawing/2014/main" id="{737EBCCD-69A8-4B79-A3A7-5C916CB4CCAB}"/>
+          <p:cNvPr id="46" name="PPAGENT_QA|parent=org-member-2-1|domains=organization-members">
+            <a:extLst xmlns:a="http://schemas.openxmlformats.org/drawingml/2006/main">
+              <a:ext uri="{FF2B5EF4-FFF2-40B4-BE49-F238E27FC236}">
+                <a16:creationId xmlns:a16="http://schemas.microsoft.com/office/drawing/2014/main" id="{3A3C366D-8876-49D0-B9D7-6809347B5BD1}"/>
               </a:ext>
             </a:extLst>
           </p:cNvPr>
@@ -3248,30 +3270,32 @@
         </p:nvSpPr>
         <p:spPr>
           <a:xfrm xmlns:a="http://schemas.openxmlformats.org/drawingml/2006/main">
-            <a:off x="10610850" y="5600700"/>
-            <a:ext cx="1028700" cy="323850"/>
+            <a:off x="10782300" y="5438775"/>
+            <a:ext cx="742950" cy="457200"/>
           </a:xfrm>
           <a:prstGeom xmlns:a="http://schemas.openxmlformats.org/drawingml/2006/main" prst="roundRect">
             <a:avLst>
-              <a:gd name="adj" fmla="val 35294"/>
+              <a:gd name="adj" fmla="val 25000"/>
             </a:avLst>
           </a:prstGeom>
           <a:solidFill xmlns:a="http://schemas.openxmlformats.org/drawingml/2006/main">
-            <a:srgbClr val="EEF4FA"/>
-          </a:solidFill>
-          <a:ln xmlns:a="http://schemas.openxmlformats.org/drawingml/2006/main" w="0">
-            <a:noFill/>
+            <a:srgbClr val="F1F5F9"/>
+          </a:solidFill>
+          <a:ln xmlns:a="http://schemas.openxmlformats.org/drawingml/2006/main" w="9525">
+            <a:solidFill>
+              <a:srgbClr val="E1E8EF"/>
+            </a:solidFill>
             <a:prstDash val="solid"/>
           </a:ln>
         </p:spPr>
         <p:txBody>
           <a:bodyPr xmlns:a="http://schemas.openxmlformats.org/drawingml/2006/main" lIns="28575" tIns="19050" rIns="28575" bIns="19050" anchor="ctr">
-            <a:normAutofit fontScale="95711"/>
+            <a:noAutofit/>
           </a:bodyPr>
           <a:lstStyle xmlns:a="http://schemas.openxmlformats.org/drawingml/2006/main"/>
           <a:p xmlns:a="http://schemas.openxmlformats.org/drawingml/2006/main">
             <a:pPr algn="ctr">
-              <a:defRPr sz="750" b="0">
+              <a:defRPr sz="1200" b="0">
                 <a:solidFill>
                   <a:srgbClr val="475569"/>
                 </a:solidFill>
@@ -3281,30 +3305,7 @@
               </a:defRPr>
             </a:pPr>
             <a:r>
-              <a:rPr sz="750" b="0">
-                <a:solidFill>
-                  <a:srgbClr val="475569"/>
-                </a:solidFill>
-                <a:latin typeface="Microsoft YaHei"/>
-                <a:ea typeface="Microsoft YaHei"/>
-                <a:cs typeface="Microsoft YaHei"/>
-              </a:rPr>
-              <a:t>沈嘉</a:t>
-            </a:r>
-          </a:p>
-          <a:p xmlns:a="http://schemas.openxmlformats.org/drawingml/2006/main">
-            <a:pPr algn="ctr">
-              <a:defRPr sz="750" b="0">
-                <a:solidFill>
-                  <a:srgbClr val="475569"/>
-                </a:solidFill>
-                <a:latin typeface="Microsoft YaHei"/>
-                <a:ea typeface="Microsoft YaHei"/>
-                <a:cs typeface="Microsoft YaHei"/>
-              </a:defRPr>
-            </a:pPr>
-            <a:r>
-              <a:rPr sz="750" b="0">
+              <a:rPr sz="1200" b="0">
                 <a:solidFill>
                   <a:srgbClr val="475569"/>
                 </a:solidFill>
@@ -3320,7 +3321,7 @@
     </p:spTree>
     <p:extLst>
       <p:ext uri="{BB962C8B-B14F-4D97-AF65-F5344CB8AC3E}">
-        <p14:creationId xmlns:p14="http://schemas.microsoft.com/office/powerpoint/2010/main" val="333022317"/>
+        <p14:creationId xmlns:p14="http://schemas.microsoft.com/office/powerpoint/2010/main" val="176508959"/>
       </p:ext>
     </p:extLst>
   </p:cSld>
